--- a/delivery/03_PPT/QuantInsight_Pro_Pitch_Deck_5min_V1.pptx
+++ b/delivery/03_PPT/QuantInsight_Pro_Pitch_Deck_5min_V1.pptx
@@ -1,23 +1,22 @@
 
 <file path=ppt/presentation.xml><?xml version="1.0" encoding="utf-8"?>
-<p:presentation xmlns:a="http://schemas.openxmlformats.org/drawingml/2006/main" xmlns:r="http://schemas.openxmlformats.org/officeDocument/2006/relationships" xmlns:p="http://schemas.openxmlformats.org/presentationml/2006/main" saveSubsetFonts="1" autoCompressPictures="0">
+<p:presentation xmlns:a="http://schemas.openxmlformats.org/drawingml/2006/main" xmlns:r="http://schemas.openxmlformats.org/officeDocument/2006/relationships" xmlns:p="http://schemas.openxmlformats.org/presentationml/2006/main" autoCompressPictures="0">
   <p:sldMasterIdLst>
     <p:sldMasterId id="2147483648" r:id="rId1"/>
   </p:sldMasterIdLst>
   <p:sldIdLst>
-    <p:sldId id="256" r:id="rId7"/>
-    <p:sldId id="257" r:id="rId8"/>
-    <p:sldId id="258" r:id="rId9"/>
-    <p:sldId id="259" r:id="rId10"/>
-    <p:sldId id="260" r:id="rId11"/>
-    <p:sldId id="261" r:id="rId12"/>
-    <p:sldId id="262" r:id="rId13"/>
-    <p:sldId id="263" r:id="rId14"/>
-    <p:sldId id="264" r:id="rId15"/>
-    <p:sldId id="265" r:id="rId16"/>
-    <p:sldId id="266" r:id="rId17"/>
+    <p:sldId id="256" r:id="rId3"/>
+    <p:sldId id="257" r:id="rId4"/>
+    <p:sldId id="258" r:id="rId5"/>
+    <p:sldId id="259" r:id="rId6"/>
+    <p:sldId id="260" r:id="rId7"/>
+    <p:sldId id="261" r:id="rId8"/>
+    <p:sldId id="262" r:id="rId9"/>
+    <p:sldId id="263" r:id="rId10"/>
+    <p:sldId id="264" r:id="rId11"/>
+    <p:sldId id="266" r:id="rId12"/>
   </p:sldIdLst>
-  <p:sldSz cx="12191695" cy="6858000" type="screen4x3"/>
+  <p:sldSz cx="12191365" cy="6858000" type="screen4x3"/>
   <p:notesSz cx="6858000" cy="9144000"/>
   <p:defaultTextStyle>
     <a:defPPr>
@@ -114,6 +113,22 @@
       </a:defRPr>
     </a:lvl9pPr>
   </p:defaultTextStyle>
+  <p:extLst>
+    <p:ext uri="{EFAFB233-063F-42B5-8137-9DF3F51BA10A}">
+      <p15:sldGuideLst xmlns:p15="http://schemas.microsoft.com/office/powerpoint/2012/main">
+        <p15:guide id="1" orient="horz" pos="2160" userDrawn="1">
+          <p15:clr>
+            <a:srgbClr val="A4A3A4"/>
+          </p15:clr>
+        </p15:guide>
+        <p15:guide id="2" pos="2880" userDrawn="1">
+          <p15:clr>
+            <a:srgbClr val="A4A3A4"/>
+          </p15:clr>
+        </p15:guide>
+      </p15:sldGuideLst>
+    </p:ext>
+  </p:extLst>
 </p:presentation>
 </file>
 
@@ -298,7 +313,6 @@
           <a:p>
             <a:fld id="{5BCAD085-E8A6-8845-BD4E-CB4CCA059FC4}" type="datetimeFigureOut">
               <a:rPr lang="en-US" smtClean="0"/>
-              <a:t>1/27/13</a:t>
             </a:fld>
             <a:endParaRPr lang="en-US"/>
           </a:p>
@@ -340,18 +354,12 @@
           <a:p>
             <a:fld id="{C1FF6DA9-008F-8B48-92A6-B652298478BF}" type="slidenum">
               <a:rPr lang="en-US" smtClean="0"/>
-              <a:t>‹#›</a:t>
             </a:fld>
             <a:endParaRPr lang="en-US"/>
           </a:p>
         </p:txBody>
       </p:sp>
     </p:spTree>
-    <p:extLst>
-      <p:ext uri="{BB962C8B-B14F-4D97-AF65-F5344CB8AC3E}">
-        <p14:creationId xmlns:p14="http://schemas.microsoft.com/office/powerpoint/2010/main" val="3168075583"/>
-      </p:ext>
-    </p:extLst>
   </p:cSld>
   <p:clrMapOvr>
     <a:masterClrMapping/>
@@ -419,6 +427,7 @@
               <a:rPr lang="en-US" smtClean="0"/>
               <a:t>Click to edit Master text styles</a:t>
             </a:r>
+            <a:endParaRPr lang="en-US" smtClean="0"/>
           </a:p>
           <a:p>
             <a:pPr lvl="1"/>
@@ -426,6 +435,7 @@
               <a:rPr lang="en-US" smtClean="0"/>
               <a:t>Second level</a:t>
             </a:r>
+            <a:endParaRPr lang="en-US" smtClean="0"/>
           </a:p>
           <a:p>
             <a:pPr lvl="2"/>
@@ -433,6 +443,7 @@
               <a:rPr lang="en-US" smtClean="0"/>
               <a:t>Third level</a:t>
             </a:r>
+            <a:endParaRPr lang="en-US" smtClean="0"/>
           </a:p>
           <a:p>
             <a:pPr lvl="3"/>
@@ -440,6 +451,7 @@
               <a:rPr lang="en-US" smtClean="0"/>
               <a:t>Fourth level</a:t>
             </a:r>
+            <a:endParaRPr lang="en-US" smtClean="0"/>
           </a:p>
           <a:p>
             <a:pPr lvl="4"/>
@@ -468,7 +480,6 @@
           <a:p>
             <a:fld id="{5BCAD085-E8A6-8845-BD4E-CB4CCA059FC4}" type="datetimeFigureOut">
               <a:rPr lang="en-US" smtClean="0"/>
-              <a:t>1/27/13</a:t>
             </a:fld>
             <a:endParaRPr lang="en-US"/>
           </a:p>
@@ -510,18 +521,12 @@
           <a:p>
             <a:fld id="{C1FF6DA9-008F-8B48-92A6-B652298478BF}" type="slidenum">
               <a:rPr lang="en-US" smtClean="0"/>
-              <a:t>‹#›</a:t>
             </a:fld>
             <a:endParaRPr lang="en-US"/>
           </a:p>
         </p:txBody>
       </p:sp>
     </p:spTree>
-    <p:extLst>
-      <p:ext uri="{BB962C8B-B14F-4D97-AF65-F5344CB8AC3E}">
-        <p14:creationId xmlns:p14="http://schemas.microsoft.com/office/powerpoint/2010/main" val="2910927964"/>
-      </p:ext>
-    </p:extLst>
   </p:cSld>
   <p:clrMapOvr>
     <a:masterClrMapping/>
@@ -599,6 +604,7 @@
               <a:rPr lang="en-US" smtClean="0"/>
               <a:t>Click to edit Master text styles</a:t>
             </a:r>
+            <a:endParaRPr lang="en-US" smtClean="0"/>
           </a:p>
           <a:p>
             <a:pPr lvl="1"/>
@@ -606,6 +612,7 @@
               <a:rPr lang="en-US" smtClean="0"/>
               <a:t>Second level</a:t>
             </a:r>
+            <a:endParaRPr lang="en-US" smtClean="0"/>
           </a:p>
           <a:p>
             <a:pPr lvl="2"/>
@@ -613,6 +620,7 @@
               <a:rPr lang="en-US" smtClean="0"/>
               <a:t>Third level</a:t>
             </a:r>
+            <a:endParaRPr lang="en-US" smtClean="0"/>
           </a:p>
           <a:p>
             <a:pPr lvl="3"/>
@@ -620,6 +628,7 @@
               <a:rPr lang="en-US" smtClean="0"/>
               <a:t>Fourth level</a:t>
             </a:r>
+            <a:endParaRPr lang="en-US" smtClean="0"/>
           </a:p>
           <a:p>
             <a:pPr lvl="4"/>
@@ -648,7 +657,6 @@
           <a:p>
             <a:fld id="{5BCAD085-E8A6-8845-BD4E-CB4CCA059FC4}" type="datetimeFigureOut">
               <a:rPr lang="en-US" smtClean="0"/>
-              <a:t>1/27/13</a:t>
             </a:fld>
             <a:endParaRPr lang="en-US"/>
           </a:p>
@@ -690,18 +698,12 @@
           <a:p>
             <a:fld id="{C1FF6DA9-008F-8B48-92A6-B652298478BF}" type="slidenum">
               <a:rPr lang="en-US" smtClean="0"/>
-              <a:t>‹#›</a:t>
             </a:fld>
             <a:endParaRPr lang="en-US"/>
           </a:p>
         </p:txBody>
       </p:sp>
     </p:spTree>
-    <p:extLst>
-      <p:ext uri="{BB962C8B-B14F-4D97-AF65-F5344CB8AC3E}">
-        <p14:creationId xmlns:p14="http://schemas.microsoft.com/office/powerpoint/2010/main" val="3612223792"/>
-      </p:ext>
-    </p:extLst>
   </p:cSld>
   <p:clrMapOvr>
     <a:masterClrMapping/>
@@ -769,6 +771,7 @@
               <a:rPr lang="en-US" smtClean="0"/>
               <a:t>Click to edit Master text styles</a:t>
             </a:r>
+            <a:endParaRPr lang="en-US" smtClean="0"/>
           </a:p>
           <a:p>
             <a:pPr lvl="1"/>
@@ -776,6 +779,7 @@
               <a:rPr lang="en-US" smtClean="0"/>
               <a:t>Second level</a:t>
             </a:r>
+            <a:endParaRPr lang="en-US" smtClean="0"/>
           </a:p>
           <a:p>
             <a:pPr lvl="2"/>
@@ -783,6 +787,7 @@
               <a:rPr lang="en-US" smtClean="0"/>
               <a:t>Third level</a:t>
             </a:r>
+            <a:endParaRPr lang="en-US" smtClean="0"/>
           </a:p>
           <a:p>
             <a:pPr lvl="3"/>
@@ -790,6 +795,7 @@
               <a:rPr lang="en-US" smtClean="0"/>
               <a:t>Fourth level</a:t>
             </a:r>
+            <a:endParaRPr lang="en-US" smtClean="0"/>
           </a:p>
           <a:p>
             <a:pPr lvl="4"/>
@@ -818,7 +824,6 @@
           <a:p>
             <a:fld id="{5BCAD085-E8A6-8845-BD4E-CB4CCA059FC4}" type="datetimeFigureOut">
               <a:rPr lang="en-US" smtClean="0"/>
-              <a:t>1/27/13</a:t>
             </a:fld>
             <a:endParaRPr lang="en-US"/>
           </a:p>
@@ -860,18 +865,12 @@
           <a:p>
             <a:fld id="{C1FF6DA9-008F-8B48-92A6-B652298478BF}" type="slidenum">
               <a:rPr lang="en-US" smtClean="0"/>
-              <a:t>‹#›</a:t>
             </a:fld>
             <a:endParaRPr lang="en-US"/>
           </a:p>
         </p:txBody>
       </p:sp>
     </p:spTree>
-    <p:extLst>
-      <p:ext uri="{BB962C8B-B14F-4D97-AF65-F5344CB8AC3E}">
-        <p14:creationId xmlns:p14="http://schemas.microsoft.com/office/powerpoint/2010/main" val="2614314258"/>
-      </p:ext>
-    </p:extLst>
   </p:cSld>
   <p:clrMapOvr>
     <a:masterClrMapping/>
@@ -1044,6 +1043,7 @@
               <a:rPr lang="en-US" smtClean="0"/>
               <a:t>Click to edit Master text styles</a:t>
             </a:r>
+            <a:endParaRPr lang="en-US" smtClean="0"/>
           </a:p>
         </p:txBody>
       </p:sp>
@@ -1064,7 +1064,6 @@
           <a:p>
             <a:fld id="{5BCAD085-E8A6-8845-BD4E-CB4CCA059FC4}" type="datetimeFigureOut">
               <a:rPr lang="en-US" smtClean="0"/>
-              <a:t>1/27/13</a:t>
             </a:fld>
             <a:endParaRPr lang="en-US"/>
           </a:p>
@@ -1106,18 +1105,12 @@
           <a:p>
             <a:fld id="{C1FF6DA9-008F-8B48-92A6-B652298478BF}" type="slidenum">
               <a:rPr lang="en-US" smtClean="0"/>
-              <a:t>‹#›</a:t>
             </a:fld>
             <a:endParaRPr lang="en-US"/>
           </a:p>
         </p:txBody>
       </p:sp>
     </p:spTree>
-    <p:extLst>
-      <p:ext uri="{BB962C8B-B14F-4D97-AF65-F5344CB8AC3E}">
-        <p14:creationId xmlns:p14="http://schemas.microsoft.com/office/powerpoint/2010/main" val="960648375"/>
-      </p:ext>
-    </p:extLst>
   </p:cSld>
   <p:clrMapOvr>
     <a:masterClrMapping/>
@@ -1218,6 +1211,7 @@
               <a:rPr lang="en-US" smtClean="0"/>
               <a:t>Click to edit Master text styles</a:t>
             </a:r>
+            <a:endParaRPr lang="en-US" smtClean="0"/>
           </a:p>
           <a:p>
             <a:pPr lvl="1"/>
@@ -1225,6 +1219,7 @@
               <a:rPr lang="en-US" smtClean="0"/>
               <a:t>Second level</a:t>
             </a:r>
+            <a:endParaRPr lang="en-US" smtClean="0"/>
           </a:p>
           <a:p>
             <a:pPr lvl="2"/>
@@ -1232,6 +1227,7 @@
               <a:rPr lang="en-US" smtClean="0"/>
               <a:t>Third level</a:t>
             </a:r>
+            <a:endParaRPr lang="en-US" smtClean="0"/>
           </a:p>
           <a:p>
             <a:pPr lvl="3"/>
@@ -1239,6 +1235,7 @@
               <a:rPr lang="en-US" smtClean="0"/>
               <a:t>Fourth level</a:t>
             </a:r>
+            <a:endParaRPr lang="en-US" smtClean="0"/>
           </a:p>
           <a:p>
             <a:pPr lvl="4"/>
@@ -1303,6 +1300,7 @@
               <a:rPr lang="en-US" smtClean="0"/>
               <a:t>Click to edit Master text styles</a:t>
             </a:r>
+            <a:endParaRPr lang="en-US" smtClean="0"/>
           </a:p>
           <a:p>
             <a:pPr lvl="1"/>
@@ -1310,6 +1308,7 @@
               <a:rPr lang="en-US" smtClean="0"/>
               <a:t>Second level</a:t>
             </a:r>
+            <a:endParaRPr lang="en-US" smtClean="0"/>
           </a:p>
           <a:p>
             <a:pPr lvl="2"/>
@@ -1317,6 +1316,7 @@
               <a:rPr lang="en-US" smtClean="0"/>
               <a:t>Third level</a:t>
             </a:r>
+            <a:endParaRPr lang="en-US" smtClean="0"/>
           </a:p>
           <a:p>
             <a:pPr lvl="3"/>
@@ -1324,6 +1324,7 @@
               <a:rPr lang="en-US" smtClean="0"/>
               <a:t>Fourth level</a:t>
             </a:r>
+            <a:endParaRPr lang="en-US" smtClean="0"/>
           </a:p>
           <a:p>
             <a:pPr lvl="4"/>
@@ -1352,7 +1353,6 @@
           <a:p>
             <a:fld id="{5BCAD085-E8A6-8845-BD4E-CB4CCA059FC4}" type="datetimeFigureOut">
               <a:rPr lang="en-US" smtClean="0"/>
-              <a:t>1/27/13</a:t>
             </a:fld>
             <a:endParaRPr lang="en-US"/>
           </a:p>
@@ -1394,18 +1394,12 @@
           <a:p>
             <a:fld id="{C1FF6DA9-008F-8B48-92A6-B652298478BF}" type="slidenum">
               <a:rPr lang="en-US" smtClean="0"/>
-              <a:t>‹#›</a:t>
             </a:fld>
             <a:endParaRPr lang="en-US"/>
           </a:p>
         </p:txBody>
       </p:sp>
     </p:spTree>
-    <p:extLst>
-      <p:ext uri="{BB962C8B-B14F-4D97-AF65-F5344CB8AC3E}">
-        <p14:creationId xmlns:p14="http://schemas.microsoft.com/office/powerpoint/2010/main" val="2782244947"/>
-      </p:ext>
-    </p:extLst>
   </p:cSld>
   <p:clrMapOvr>
     <a:masterClrMapping/>
@@ -1519,6 +1513,7 @@
               <a:rPr lang="en-US" smtClean="0"/>
               <a:t>Click to edit Master text styles</a:t>
             </a:r>
+            <a:endParaRPr lang="en-US" smtClean="0"/>
           </a:p>
         </p:txBody>
       </p:sp>
@@ -1575,6 +1570,7 @@
               <a:rPr lang="en-US" smtClean="0"/>
               <a:t>Click to edit Master text styles</a:t>
             </a:r>
+            <a:endParaRPr lang="en-US" smtClean="0"/>
           </a:p>
           <a:p>
             <a:pPr lvl="1"/>
@@ -1582,6 +1578,7 @@
               <a:rPr lang="en-US" smtClean="0"/>
               <a:t>Second level</a:t>
             </a:r>
+            <a:endParaRPr lang="en-US" smtClean="0"/>
           </a:p>
           <a:p>
             <a:pPr lvl="2"/>
@@ -1589,6 +1586,7 @@
               <a:rPr lang="en-US" smtClean="0"/>
               <a:t>Third level</a:t>
             </a:r>
+            <a:endParaRPr lang="en-US" smtClean="0"/>
           </a:p>
           <a:p>
             <a:pPr lvl="3"/>
@@ -1596,6 +1594,7 @@
               <a:rPr lang="en-US" smtClean="0"/>
               <a:t>Fourth level</a:t>
             </a:r>
+            <a:endParaRPr lang="en-US" smtClean="0"/>
           </a:p>
           <a:p>
             <a:pPr lvl="4"/>
@@ -1669,6 +1668,7 @@
               <a:rPr lang="en-US" smtClean="0"/>
               <a:t>Click to edit Master text styles</a:t>
             </a:r>
+            <a:endParaRPr lang="en-US" smtClean="0"/>
           </a:p>
         </p:txBody>
       </p:sp>
@@ -1725,6 +1725,7 @@
               <a:rPr lang="en-US" smtClean="0"/>
               <a:t>Click to edit Master text styles</a:t>
             </a:r>
+            <a:endParaRPr lang="en-US" smtClean="0"/>
           </a:p>
           <a:p>
             <a:pPr lvl="1"/>
@@ -1732,6 +1733,7 @@
               <a:rPr lang="en-US" smtClean="0"/>
               <a:t>Second level</a:t>
             </a:r>
+            <a:endParaRPr lang="en-US" smtClean="0"/>
           </a:p>
           <a:p>
             <a:pPr lvl="2"/>
@@ -1739,6 +1741,7 @@
               <a:rPr lang="en-US" smtClean="0"/>
               <a:t>Third level</a:t>
             </a:r>
+            <a:endParaRPr lang="en-US" smtClean="0"/>
           </a:p>
           <a:p>
             <a:pPr lvl="3"/>
@@ -1746,6 +1749,7 @@
               <a:rPr lang="en-US" smtClean="0"/>
               <a:t>Fourth level</a:t>
             </a:r>
+            <a:endParaRPr lang="en-US" smtClean="0"/>
           </a:p>
           <a:p>
             <a:pPr lvl="4"/>
@@ -1774,7 +1778,6 @@
           <a:p>
             <a:fld id="{5BCAD085-E8A6-8845-BD4E-CB4CCA059FC4}" type="datetimeFigureOut">
               <a:rPr lang="en-US" smtClean="0"/>
-              <a:t>1/27/13</a:t>
             </a:fld>
             <a:endParaRPr lang="en-US"/>
           </a:p>
@@ -1816,18 +1819,12 @@
           <a:p>
             <a:fld id="{C1FF6DA9-008F-8B48-92A6-B652298478BF}" type="slidenum">
               <a:rPr lang="en-US" smtClean="0"/>
-              <a:t>‹#›</a:t>
             </a:fld>
             <a:endParaRPr lang="en-US"/>
           </a:p>
         </p:txBody>
       </p:sp>
     </p:spTree>
-    <p:extLst>
-      <p:ext uri="{BB962C8B-B14F-4D97-AF65-F5344CB8AC3E}">
-        <p14:creationId xmlns:p14="http://schemas.microsoft.com/office/powerpoint/2010/main" val="990158736"/>
-      </p:ext>
-    </p:extLst>
   </p:cSld>
   <p:clrMapOvr>
     <a:masterClrMapping/>
@@ -1892,7 +1889,6 @@
           <a:p>
             <a:fld id="{5BCAD085-E8A6-8845-BD4E-CB4CCA059FC4}" type="datetimeFigureOut">
               <a:rPr lang="en-US" smtClean="0"/>
-              <a:t>1/27/13</a:t>
             </a:fld>
             <a:endParaRPr lang="en-US"/>
           </a:p>
@@ -1934,18 +1930,12 @@
           <a:p>
             <a:fld id="{C1FF6DA9-008F-8B48-92A6-B652298478BF}" type="slidenum">
               <a:rPr lang="en-US" smtClean="0"/>
-              <a:t>‹#›</a:t>
             </a:fld>
             <a:endParaRPr lang="en-US"/>
           </a:p>
         </p:txBody>
       </p:sp>
     </p:spTree>
-    <p:extLst>
-      <p:ext uri="{BB962C8B-B14F-4D97-AF65-F5344CB8AC3E}">
-        <p14:creationId xmlns:p14="http://schemas.microsoft.com/office/powerpoint/2010/main" val="727027711"/>
-      </p:ext>
-    </p:extLst>
   </p:cSld>
   <p:clrMapOvr>
     <a:masterClrMapping/>
@@ -1987,7 +1977,6 @@
           <a:p>
             <a:fld id="{5BCAD085-E8A6-8845-BD4E-CB4CCA059FC4}" type="datetimeFigureOut">
               <a:rPr lang="en-US" smtClean="0"/>
-              <a:t>1/27/13</a:t>
             </a:fld>
             <a:endParaRPr lang="en-US"/>
           </a:p>
@@ -2029,18 +2018,12 @@
           <a:p>
             <a:fld id="{C1FF6DA9-008F-8B48-92A6-B652298478BF}" type="slidenum">
               <a:rPr lang="en-US" smtClean="0"/>
-              <a:t>‹#›</a:t>
             </a:fld>
             <a:endParaRPr lang="en-US"/>
           </a:p>
         </p:txBody>
       </p:sp>
     </p:spTree>
-    <p:extLst>
-      <p:ext uri="{BB962C8B-B14F-4D97-AF65-F5344CB8AC3E}">
-        <p14:creationId xmlns:p14="http://schemas.microsoft.com/office/powerpoint/2010/main" val="1212999818"/>
-      </p:ext>
-    </p:extLst>
   </p:cSld>
   <p:clrMapOvr>
     <a:masterClrMapping/>
@@ -2150,6 +2133,7 @@
               <a:rPr lang="en-US" smtClean="0"/>
               <a:t>Click to edit Master text styles</a:t>
             </a:r>
+            <a:endParaRPr lang="en-US" smtClean="0"/>
           </a:p>
           <a:p>
             <a:pPr lvl="1"/>
@@ -2157,6 +2141,7 @@
               <a:rPr lang="en-US" smtClean="0"/>
               <a:t>Second level</a:t>
             </a:r>
+            <a:endParaRPr lang="en-US" smtClean="0"/>
           </a:p>
           <a:p>
             <a:pPr lvl="2"/>
@@ -2164,6 +2149,7 @@
               <a:rPr lang="en-US" smtClean="0"/>
               <a:t>Third level</a:t>
             </a:r>
+            <a:endParaRPr lang="en-US" smtClean="0"/>
           </a:p>
           <a:p>
             <a:pPr lvl="3"/>
@@ -2171,6 +2157,7 @@
               <a:rPr lang="en-US" smtClean="0"/>
               <a:t>Fourth level</a:t>
             </a:r>
+            <a:endParaRPr lang="en-US" smtClean="0"/>
           </a:p>
           <a:p>
             <a:pPr lvl="4"/>
@@ -2244,6 +2231,7 @@
               <a:rPr lang="en-US" smtClean="0"/>
               <a:t>Click to edit Master text styles</a:t>
             </a:r>
+            <a:endParaRPr lang="en-US" smtClean="0"/>
           </a:p>
         </p:txBody>
       </p:sp>
@@ -2264,7 +2252,6 @@
           <a:p>
             <a:fld id="{5BCAD085-E8A6-8845-BD4E-CB4CCA059FC4}" type="datetimeFigureOut">
               <a:rPr lang="en-US" smtClean="0"/>
-              <a:t>1/27/13</a:t>
             </a:fld>
             <a:endParaRPr lang="en-US"/>
           </a:p>
@@ -2306,18 +2293,12 @@
           <a:p>
             <a:fld id="{C1FF6DA9-008F-8B48-92A6-B652298478BF}" type="slidenum">
               <a:rPr lang="en-US" smtClean="0"/>
-              <a:t>‹#›</a:t>
             </a:fld>
             <a:endParaRPr lang="en-US"/>
           </a:p>
         </p:txBody>
       </p:sp>
     </p:spTree>
-    <p:extLst>
-      <p:ext uri="{BB962C8B-B14F-4D97-AF65-F5344CB8AC3E}">
-        <p14:creationId xmlns:p14="http://schemas.microsoft.com/office/powerpoint/2010/main" val="1840726560"/>
-      </p:ext>
-    </p:extLst>
   </p:cSld>
   <p:clrMapOvr>
     <a:masterClrMapping/>
@@ -2497,6 +2478,7 @@
               <a:rPr lang="en-US" smtClean="0"/>
               <a:t>Click to edit Master text styles</a:t>
             </a:r>
+            <a:endParaRPr lang="en-US" smtClean="0"/>
           </a:p>
         </p:txBody>
       </p:sp>
@@ -2517,7 +2499,6 @@
           <a:p>
             <a:fld id="{5BCAD085-E8A6-8845-BD4E-CB4CCA059FC4}" type="datetimeFigureOut">
               <a:rPr lang="en-US" smtClean="0"/>
-              <a:t>1/27/13</a:t>
             </a:fld>
             <a:endParaRPr lang="en-US"/>
           </a:p>
@@ -2559,18 +2540,12 @@
           <a:p>
             <a:fld id="{C1FF6DA9-008F-8B48-92A6-B652298478BF}" type="slidenum">
               <a:rPr lang="en-US" smtClean="0"/>
-              <a:t>‹#›</a:t>
             </a:fld>
             <a:endParaRPr lang="en-US"/>
           </a:p>
         </p:txBody>
       </p:sp>
     </p:spTree>
-    <p:extLst>
-      <p:ext uri="{BB962C8B-B14F-4D97-AF65-F5344CB8AC3E}">
-        <p14:creationId xmlns:p14="http://schemas.microsoft.com/office/powerpoint/2010/main" val="3889236939"/>
-      </p:ext>
-    </p:extLst>
   </p:cSld>
   <p:clrMapOvr>
     <a:masterClrMapping/>
@@ -2663,6 +2638,7 @@
               <a:rPr lang="en-US" smtClean="0"/>
               <a:t>Click to edit Master text styles</a:t>
             </a:r>
+            <a:endParaRPr lang="en-US" smtClean="0"/>
           </a:p>
           <a:p>
             <a:pPr lvl="1"/>
@@ -2670,6 +2646,7 @@
               <a:rPr lang="en-US" smtClean="0"/>
               <a:t>Second level</a:t>
             </a:r>
+            <a:endParaRPr lang="en-US" smtClean="0"/>
           </a:p>
           <a:p>
             <a:pPr lvl="2"/>
@@ -2677,6 +2654,7 @@
               <a:rPr lang="en-US" smtClean="0"/>
               <a:t>Third level</a:t>
             </a:r>
+            <a:endParaRPr lang="en-US" smtClean="0"/>
           </a:p>
           <a:p>
             <a:pPr lvl="3"/>
@@ -2684,6 +2662,7 @@
               <a:rPr lang="en-US" smtClean="0"/>
               <a:t>Fourth level</a:t>
             </a:r>
+            <a:endParaRPr lang="en-US" smtClean="0"/>
           </a:p>
           <a:p>
             <a:pPr lvl="4"/>
@@ -2730,7 +2709,6 @@
           <a:p>
             <a:fld id="{5BCAD085-E8A6-8845-BD4E-CB4CCA059FC4}" type="datetimeFigureOut">
               <a:rPr lang="en-US" smtClean="0"/>
-              <a:t>1/27/13</a:t>
             </a:fld>
             <a:endParaRPr lang="en-US"/>
           </a:p>
@@ -2808,18 +2786,12 @@
           <a:p>
             <a:fld id="{C1FF6DA9-008F-8B48-92A6-B652298478BF}" type="slidenum">
               <a:rPr lang="en-US" smtClean="0"/>
-              <a:t>‹#›</a:t>
             </a:fld>
             <a:endParaRPr lang="en-US"/>
           </a:p>
         </p:txBody>
       </p:sp>
     </p:spTree>
-    <p:extLst>
-      <p:ext uri="{BB962C8B-B14F-4D97-AF65-F5344CB8AC3E}">
-        <p14:creationId xmlns:p14="http://schemas.microsoft.com/office/powerpoint/2010/main" val="2209977519"/>
-      </p:ext>
-    </p:extLst>
   </p:cSld>
   <p:clrMap bg1="lt1" tx1="dk1" bg2="lt2" tx2="dk2" accent1="accent1" accent2="accent2" accent3="accent3" accent4="accent4" accent5="accent5" accent6="accent6" hlink="hlink" folHlink="folHlink"/>
   <p:sldLayoutIdLst>
@@ -2857,7 +2829,7 @@
         <a:spcBef>
           <a:spcPct val="20000"/>
         </a:spcBef>
-        <a:buFont typeface="Arial"/>
+        <a:buFont typeface="Arial" panose="020B0604020202020204"/>
         <a:buChar char="•"/>
         <a:defRPr sz="3200" kern="1200">
           <a:solidFill>
@@ -2872,7 +2844,7 @@
         <a:spcBef>
           <a:spcPct val="20000"/>
         </a:spcBef>
-        <a:buFont typeface="Arial"/>
+        <a:buFont typeface="Arial" panose="020B0604020202020204"/>
         <a:buChar char="–"/>
         <a:defRPr sz="2800" kern="1200">
           <a:solidFill>
@@ -2887,7 +2859,7 @@
         <a:spcBef>
           <a:spcPct val="20000"/>
         </a:spcBef>
-        <a:buFont typeface="Arial"/>
+        <a:buFont typeface="Arial" panose="020B0604020202020204"/>
         <a:buChar char="•"/>
         <a:defRPr sz="2400" kern="1200">
           <a:solidFill>
@@ -2902,7 +2874,7 @@
         <a:spcBef>
           <a:spcPct val="20000"/>
         </a:spcBef>
-        <a:buFont typeface="Arial"/>
+        <a:buFont typeface="Arial" panose="020B0604020202020204"/>
         <a:buChar char="–"/>
         <a:defRPr sz="2000" kern="1200">
           <a:solidFill>
@@ -2917,7 +2889,7 @@
         <a:spcBef>
           <a:spcPct val="20000"/>
         </a:spcBef>
-        <a:buFont typeface="Arial"/>
+        <a:buFont typeface="Arial" panose="020B0604020202020204"/>
         <a:buChar char="»"/>
         <a:defRPr sz="2000" kern="1200">
           <a:solidFill>
@@ -2932,7 +2904,7 @@
         <a:spcBef>
           <a:spcPct val="20000"/>
         </a:spcBef>
-        <a:buFont typeface="Arial"/>
+        <a:buFont typeface="Arial" panose="020B0604020202020204"/>
         <a:buChar char="•"/>
         <a:defRPr sz="2000" kern="1200">
           <a:solidFill>
@@ -2947,7 +2919,7 @@
         <a:spcBef>
           <a:spcPct val="20000"/>
         </a:spcBef>
-        <a:buFont typeface="Arial"/>
+        <a:buFont typeface="Arial" panose="020B0604020202020204"/>
         <a:buChar char="•"/>
         <a:defRPr sz="2000" kern="1200">
           <a:solidFill>
@@ -2962,7 +2934,7 @@
         <a:spcBef>
           <a:spcPct val="20000"/>
         </a:spcBef>
-        <a:buFont typeface="Arial"/>
+        <a:buFont typeface="Arial" panose="020B0604020202020204"/>
         <a:buChar char="•"/>
         <a:defRPr sz="2000" kern="1200">
           <a:solidFill>
@@ -2977,7 +2949,7 @@
         <a:spcBef>
           <a:spcPct val="20000"/>
         </a:spcBef>
-        <a:buFont typeface="Arial"/>
+        <a:buFont typeface="Arial" panose="020B0604020202020204"/>
         <a:buChar char="•"/>
         <a:defRPr sz="2000" kern="1200">
           <a:solidFill>
@@ -3089,7 +3061,7 @@
 </file>
 
 <file path=ppt/slides/slide1.xml><?xml version="1.0" encoding="utf-8"?>
-<p:sld xmlns:a="http://schemas.openxmlformats.org/drawingml/2006/main" xmlns:p="http://schemas.openxmlformats.org/presentationml/2006/main" xmlns:r="http://schemas.openxmlformats.org/officeDocument/2006/relationships">
+<p:sld xmlns:a="http://schemas.openxmlformats.org/drawingml/2006/main" xmlns:r="http://schemas.openxmlformats.org/officeDocument/2006/relationships" xmlns:p="http://schemas.openxmlformats.org/presentationml/2006/main">
   <p:cSld>
     <p:spTree>
       <p:nvGrpSpPr>
@@ -3169,10 +3141,16 @@
                 <a:solidFill>
                   <a:srgbClr val="FFFFFF"/>
                 </a:solidFill>
-                <a:latin typeface="Microsoft YaHei"/>
+                <a:latin typeface="微软雅黑" panose="020B0503020204020204" charset="-122"/>
               </a:rPr>
               <a:t>AFAC2026 金融智能创新大赛 · 决赛路演</a:t>
             </a:r>
+            <a:endParaRPr sz="2200" b="0">
+              <a:solidFill>
+                <a:srgbClr val="FFFFFF"/>
+              </a:solidFill>
+              <a:latin typeface="微软雅黑" panose="020B0503020204020204" charset="-122"/>
+            </a:endParaRPr>
           </a:p>
         </p:txBody>
       </p:sp>
@@ -3204,10 +3182,16 @@
                 <a:solidFill>
                   <a:srgbClr val="FFFFFF"/>
                 </a:solidFill>
-                <a:latin typeface="Microsoft YaHei"/>
+                <a:latin typeface="微软雅黑" panose="020B0503020204020204" charset="-122"/>
               </a:rPr>
               <a:t>QuantInsight Pro</a:t>
             </a:r>
+            <a:endParaRPr sz="5800" b="1">
+              <a:solidFill>
+                <a:srgbClr val="FFFFFF"/>
+              </a:solidFill>
+              <a:latin typeface="微软雅黑" panose="020B0503020204020204" charset="-122"/>
+            </a:endParaRPr>
           </a:p>
         </p:txBody>
       </p:sp>
@@ -3239,10 +3223,16 @@
                 <a:solidFill>
                   <a:srgbClr val="FFFFFF"/>
                 </a:solidFill>
-                <a:latin typeface="Microsoft YaHei"/>
+                <a:latin typeface="微软雅黑" panose="020B0503020204020204" charset="-122"/>
               </a:rPr>
               <a:t>AI 驱动的另类数据量化投研平台</a:t>
             </a:r>
+            <a:endParaRPr sz="2600" b="0">
+              <a:solidFill>
+                <a:srgbClr val="FFFFFF"/>
+              </a:solidFill>
+              <a:latin typeface="微软雅黑" panose="020B0503020204020204" charset="-122"/>
+            </a:endParaRPr>
           </a:p>
         </p:txBody>
       </p:sp>
@@ -3274,10 +3264,16 @@
                 <a:solidFill>
                   <a:srgbClr val="FFFFFF"/>
                 </a:solidFill>
-                <a:latin typeface="Microsoft YaHei"/>
+                <a:latin typeface="微软雅黑" panose="020B0503020204020204" charset="-122"/>
               </a:rPr>
               <a:t>SHAP 可解释 AI  ·  11.4 年回测  ·  永字资管 POC</a:t>
             </a:r>
+            <a:endParaRPr sz="2000" b="0">
+              <a:solidFill>
+                <a:srgbClr val="FFFFFF"/>
+              </a:solidFill>
+              <a:latin typeface="微软雅黑" panose="020B0503020204020204" charset="-122"/>
+            </a:endParaRPr>
           </a:p>
         </p:txBody>
       </p:sp>
@@ -3309,10 +3305,16 @@
                 <a:solidFill>
                   <a:srgbClr val="FFFFFF"/>
                 </a:solidFill>
-                <a:latin typeface="Microsoft YaHei"/>
+                <a:latin typeface="微软雅黑" panose="020B0503020204020204" charset="-122"/>
               </a:rPr>
               <a:t>5 分钟路演</a:t>
             </a:r>
+            <a:endParaRPr sz="1800" b="1">
+              <a:solidFill>
+                <a:srgbClr val="FFFFFF"/>
+              </a:solidFill>
+              <a:latin typeface="微软雅黑" panose="020B0503020204020204" charset="-122"/>
+            </a:endParaRPr>
           </a:p>
         </p:txBody>
       </p:sp>
@@ -3344,10 +3346,16 @@
                 <a:solidFill>
                   <a:srgbClr val="FFFFFF"/>
                 </a:solidFill>
-                <a:latin typeface="Microsoft YaHei"/>
+                <a:latin typeface="微软雅黑" panose="020B0503020204020204" charset="-122"/>
               </a:rPr>
               <a:t>2026-07-08  ·  AFAC2026 · QuantInsight Pro</a:t>
             </a:r>
+            <a:endParaRPr sz="1200" b="0">
+              <a:solidFill>
+                <a:srgbClr val="FFFFFF"/>
+              </a:solidFill>
+              <a:latin typeface="微软雅黑" panose="020B0503020204020204" charset="-122"/>
+            </a:endParaRPr>
           </a:p>
         </p:txBody>
       </p:sp>
@@ -3360,7 +3368,7 @@
 </file>
 
 <file path=ppt/slides/slide10.xml><?xml version="1.0" encoding="utf-8"?>
-<p:sld xmlns:a="http://schemas.openxmlformats.org/drawingml/2006/main" xmlns:p="http://schemas.openxmlformats.org/presentationml/2006/main" xmlns:r="http://schemas.openxmlformats.org/officeDocument/2006/relationships">
+<p:sld xmlns:a="http://schemas.openxmlformats.org/drawingml/2006/main" xmlns:r="http://schemas.openxmlformats.org/officeDocument/2006/relationships" xmlns:p="http://schemas.openxmlformats.org/presentationml/2006/main">
   <p:cSld>
     <p:spTree>
       <p:nvGrpSpPr>
@@ -3378,7 +3386,7 @@
         <p:spPr>
           <a:xfrm>
             <a:off x="0" y="0"/>
-            <a:ext cx="12191695" cy="822960"/>
+            <a:ext cx="12191695" cy="6858000"/>
           </a:xfrm>
           <a:prstGeom prst="rect">
             <a:avLst/>
@@ -3420,78 +3428,8 @@
         </p:nvSpPr>
         <p:spPr>
           <a:xfrm>
-            <a:off x="457200" y="91440"/>
-            <a:ext cx="10972800" cy="640080"/>
-          </a:xfrm>
-          <a:prstGeom prst="rect">
-            <a:avLst/>
-          </a:prstGeom>
-          <a:noFill/>
-        </p:spPr>
-        <p:txBody>
-          <a:bodyPr wrap="square" anchor="ctr">
-            <a:spAutoFit/>
-          </a:bodyPr>
-          <a:lstStyle/>
-          <a:p>
-            <a:pPr algn="l"/>
-            <a:r>
-              <a:rPr sz="2800" b="1">
-                <a:solidFill>
-                  <a:srgbClr val="FFFFFF"/>
-                </a:solidFill>
-                <a:latin typeface="Microsoft YaHei"/>
-              </a:rPr>
-              <a:t>风险预案 | 5 大风险 + 3 套应对</a:t>
-            </a:r>
-          </a:p>
-        </p:txBody>
-      </p:sp>
-      <p:sp>
-        <p:nvSpPr>
-          <p:cNvPr id="4" name="TextBox 3"/>
-          <p:cNvSpPr txBox="1"/>
-          <p:nvPr/>
-        </p:nvSpPr>
-        <p:spPr>
-          <a:xfrm>
-            <a:off x="457200" y="502920"/>
-            <a:ext cx="10972800" cy="274320"/>
-          </a:xfrm>
-          <a:prstGeom prst="rect">
-            <a:avLst/>
-          </a:prstGeom>
-          <a:noFill/>
-        </p:spPr>
-        <p:txBody>
-          <a:bodyPr wrap="square" anchor="ctr">
-            <a:spAutoFit/>
-          </a:bodyPr>
-          <a:lstStyle/>
-          <a:p>
-            <a:pPr algn="l"/>
-            <a:r>
-              <a:rPr sz="1200" b="0">
-                <a:solidFill>
-                  <a:srgbClr val="FFFFFF"/>
-                </a:solidFill>
-                <a:latin typeface="Microsoft YaHei"/>
-              </a:rPr>
-              <a:t>监管 / 数据 / 技术 / 市场 / 团队  ·  已全部闭环</a:t>
-            </a:r>
-          </a:p>
-        </p:txBody>
-      </p:sp>
-      <p:sp>
-        <p:nvSpPr>
-          <p:cNvPr id="5" name="TextBox 4"/>
-          <p:cNvSpPr txBox="1"/>
-          <p:nvPr/>
-        </p:nvSpPr>
-        <p:spPr>
-          <a:xfrm>
-            <a:off x="457200" y="6537960"/>
-            <a:ext cx="11247120" cy="274320"/>
+            <a:off x="457200" y="1097280"/>
+            <a:ext cx="11247120" cy="457200"/>
           </a:xfrm>
           <a:prstGeom prst="rect">
             <a:avLst/>
@@ -3506,14 +3444,102 @@
           <a:p>
             <a:pPr algn="ctr"/>
             <a:r>
-              <a:rPr sz="1000" b="0">
-                <a:solidFill>
-                  <a:srgbClr val="888888"/>
-                </a:solidFill>
-                <a:latin typeface="Microsoft YaHei"/>
-              </a:rPr>
-              <a:t>AFAC2026 · 5 分钟路演  |  QuantInsight Pro</a:t>
-            </a:r>
+              <a:rPr sz="2200" b="0">
+                <a:solidFill>
+                  <a:srgbClr val="FFFFFF"/>
+                </a:solidFill>
+                <a:latin typeface="微软雅黑" panose="020B0503020204020204" charset="-122"/>
+              </a:rPr>
+              <a:t>愿景 | Vision</a:t>
+            </a:r>
+            <a:endParaRPr sz="2200" b="0">
+              <a:solidFill>
+                <a:srgbClr val="FFFFFF"/>
+              </a:solidFill>
+              <a:latin typeface="微软雅黑" panose="020B0503020204020204" charset="-122"/>
+            </a:endParaRPr>
+          </a:p>
+        </p:txBody>
+      </p:sp>
+      <p:sp>
+        <p:nvSpPr>
+          <p:cNvPr id="4" name="TextBox 3"/>
+          <p:cNvSpPr txBox="1"/>
+          <p:nvPr/>
+        </p:nvSpPr>
+        <p:spPr>
+          <a:xfrm>
+            <a:off x="457200" y="2011680"/>
+            <a:ext cx="11247120" cy="1097280"/>
+          </a:xfrm>
+          <a:prstGeom prst="rect">
+            <a:avLst/>
+          </a:prstGeom>
+          <a:noFill/>
+        </p:spPr>
+        <p:txBody>
+          <a:bodyPr wrap="square" anchor="t">
+            <a:spAutoFit/>
+          </a:bodyPr>
+          <a:lstStyle/>
+          <a:p>
+            <a:pPr algn="ctr"/>
+            <a:r>
+              <a:rPr sz="4600" b="1">
+                <a:solidFill>
+                  <a:srgbClr val="FFFFFF"/>
+                </a:solidFill>
+                <a:latin typeface="微软雅黑" panose="020B0503020204020204" charset="-122"/>
+              </a:rPr>
+              <a:t>让 1.5 万家中小私募</a:t>
+            </a:r>
+            <a:endParaRPr sz="4600" b="1">
+              <a:solidFill>
+                <a:srgbClr val="FFFFFF"/>
+              </a:solidFill>
+              <a:latin typeface="微软雅黑" panose="020B0503020204020204" charset="-122"/>
+            </a:endParaRPr>
+          </a:p>
+        </p:txBody>
+      </p:sp>
+      <p:sp>
+        <p:nvSpPr>
+          <p:cNvPr id="5" name="TextBox 4"/>
+          <p:cNvSpPr txBox="1"/>
+          <p:nvPr/>
+        </p:nvSpPr>
+        <p:spPr>
+          <a:xfrm>
+            <a:off x="457200" y="3108960"/>
+            <a:ext cx="11247120" cy="1097280"/>
+          </a:xfrm>
+          <a:prstGeom prst="rect">
+            <a:avLst/>
+          </a:prstGeom>
+          <a:noFill/>
+        </p:spPr>
+        <p:txBody>
+          <a:bodyPr wrap="square" anchor="t">
+            <a:spAutoFit/>
+          </a:bodyPr>
+          <a:lstStyle/>
+          <a:p>
+            <a:pPr algn="ctr"/>
+            <a:r>
+              <a:rPr sz="4600" b="1">
+                <a:solidFill>
+                  <a:srgbClr val="FFFFFF"/>
+                </a:solidFill>
+                <a:latin typeface="微软雅黑" panose="020B0503020204020204" charset="-122"/>
+              </a:rPr>
+              <a:t>0 成本拥有 AI 投研能力</a:t>
+            </a:r>
+            <a:endParaRPr sz="4600" b="1">
+              <a:solidFill>
+                <a:srgbClr val="FFFFFF"/>
+              </a:solidFill>
+              <a:latin typeface="微软雅黑" panose="020B0503020204020204" charset="-122"/>
+            </a:endParaRPr>
           </a:p>
         </p:txBody>
       </p:sp>
@@ -3525,8 +3551,8 @@
         </p:nvSpPr>
         <p:spPr>
           <a:xfrm>
-            <a:off x="457200" y="1188720"/>
-            <a:ext cx="11247120" cy="5029200"/>
+            <a:off x="457200" y="4389120"/>
+            <a:ext cx="11247120" cy="457200"/>
           </a:xfrm>
           <a:prstGeom prst="rect">
             <a:avLst/>
@@ -3534,89 +3560,109 @@
           <a:noFill/>
         </p:spPr>
         <p:txBody>
-          <a:bodyPr wrap="square">
+          <a:bodyPr wrap="square" anchor="t">
             <a:spAutoFit/>
           </a:bodyPr>
           <a:lstStyle/>
           <a:p>
-            <a:pPr algn="l">
-              <a:spcAft>
-                <a:spcPts val="600"/>
-              </a:spcAft>
-            </a:pPr>
-            <a:r>
-              <a:rPr sz="1800">
-                <a:solidFill>
-                  <a:srgbClr val="1A1A1A"/>
-                </a:solidFill>
-                <a:latin typeface="Microsoft YaHei"/>
-              </a:rPr>
-              <a:t>• ① 监管风险：AI 投顾持牌 → 已与永字合规团队合作，SHAP 自动审计报告</a:t>
-            </a:r>
-          </a:p>
-          <a:p>
-            <a:pPr algn="l">
-              <a:spcAft>
-                <a:spcPts val="600"/>
-              </a:spcAft>
-            </a:pPr>
-            <a:r>
-              <a:rPr sz="1800">
-                <a:solidFill>
-                  <a:srgbClr val="1A1A1A"/>
-                </a:solidFill>
-                <a:latin typeface="Microsoft YaHei"/>
-              </a:rPr>
-              <a:t>• ② 数据合规：另类数据来源 → 已签 5 家授权，使用前 100% 脱敏</a:t>
-            </a:r>
-          </a:p>
-          <a:p>
-            <a:pPr algn="l">
-              <a:spcAft>
-                <a:spcPts val="600"/>
-              </a:spcAft>
-            </a:pPr>
-            <a:r>
-              <a:rPr sz="1800">
-                <a:solidFill>
-                  <a:srgbClr val="1A1A1A"/>
-                </a:solidFill>
-                <a:latin typeface="Microsoft YaHei"/>
-              </a:rPr>
-              <a:t>• ③ 技术风险：开源回测引擎被 fork → MIT License + 专利 + 软著 + 持续创新</a:t>
-            </a:r>
-          </a:p>
-          <a:p>
-            <a:pPr algn="l">
-              <a:spcAft>
-                <a:spcPts val="600"/>
-              </a:spcAft>
-            </a:pPr>
-            <a:r>
-              <a:rPr sz="1800">
-                <a:solidFill>
-                  <a:srgbClr val="1A1A1A"/>
-                </a:solidFill>
-                <a:latin typeface="Microsoft YaHei"/>
-              </a:rPr>
-              <a:t>• ④ 市场风险：竞品（Wind AI） → 差异化 SHAP + 中小私募长尾 + 2.4 万/年低价</a:t>
-            </a:r>
-          </a:p>
-          <a:p>
-            <a:pPr algn="l">
-              <a:spcAft>
-                <a:spcPts val="600"/>
-              </a:spcAft>
-            </a:pPr>
-            <a:r>
-              <a:rPr sz="1800">
-                <a:solidFill>
-                  <a:srgbClr val="1A1A1A"/>
-                </a:solidFill>
-                <a:latin typeface="Microsoft YaHei"/>
-              </a:rPr>
-              <a:t>• ⑤ 团队风险：4 人创业稳定性 → 期权池 35% + 顾问委员会 5 位 + 5 校 MOU</a:t>
-            </a:r>
+            <a:pPr algn="ctr"/>
+            <a:r>
+              <a:rPr sz="1800" b="0">
+                <a:solidFill>
+                  <a:srgbClr val="FFFFFF"/>
+                </a:solidFill>
+                <a:latin typeface="微软雅黑" panose="020B0503020204020204" charset="-122"/>
+              </a:rPr>
+              <a:t>QuantInsight Pro 团队 · 冯亦根 / 王宇寒 / 官馨 / 梁理智</a:t>
+            </a:r>
+            <a:endParaRPr sz="1800" b="0">
+              <a:solidFill>
+                <a:srgbClr val="FFFFFF"/>
+              </a:solidFill>
+              <a:latin typeface="微软雅黑" panose="020B0503020204020204" charset="-122"/>
+            </a:endParaRPr>
+          </a:p>
+        </p:txBody>
+      </p:sp>
+      <p:sp>
+        <p:nvSpPr>
+          <p:cNvPr id="7" name="TextBox 6"/>
+          <p:cNvSpPr txBox="1"/>
+          <p:nvPr/>
+        </p:nvSpPr>
+        <p:spPr>
+          <a:xfrm>
+            <a:off x="457200" y="5029200"/>
+            <a:ext cx="11247120" cy="457200"/>
+          </a:xfrm>
+          <a:prstGeom prst="rect">
+            <a:avLst/>
+          </a:prstGeom>
+          <a:noFill/>
+        </p:spPr>
+        <p:txBody>
+          <a:bodyPr wrap="square" anchor="t">
+            <a:spAutoFit/>
+          </a:bodyPr>
+          <a:lstStyle/>
+          <a:p>
+            <a:pPr algn="ctr"/>
+            <a:r>
+              <a:rPr sz="1600" b="0">
+                <a:solidFill>
+                  <a:srgbClr val="FFFFFF"/>
+                </a:solidFill>
+                <a:latin typeface="微软雅黑" panose="020B0503020204020204" charset="-122"/>
+              </a:rPr>
+              <a:t>SHAP 可解释  ·  11.4 年回测  ·  永字资管 POC</a:t>
+            </a:r>
+            <a:endParaRPr sz="1600" b="0">
+              <a:solidFill>
+                <a:srgbClr val="FFFFFF"/>
+              </a:solidFill>
+              <a:latin typeface="微软雅黑" panose="020B0503020204020204" charset="-122"/>
+            </a:endParaRPr>
+          </a:p>
+        </p:txBody>
+      </p:sp>
+      <p:sp>
+        <p:nvSpPr>
+          <p:cNvPr id="8" name="TextBox 7"/>
+          <p:cNvSpPr txBox="1"/>
+          <p:nvPr/>
+        </p:nvSpPr>
+        <p:spPr>
+          <a:xfrm>
+            <a:off x="457200" y="6035040"/>
+            <a:ext cx="11247120" cy="365760"/>
+          </a:xfrm>
+          <a:prstGeom prst="rect">
+            <a:avLst/>
+          </a:prstGeom>
+          <a:noFill/>
+        </p:spPr>
+        <p:txBody>
+          <a:bodyPr wrap="square" anchor="t">
+            <a:spAutoFit/>
+          </a:bodyPr>
+          <a:lstStyle/>
+          <a:p>
+            <a:pPr algn="ctr"/>
+            <a:r>
+              <a:rPr sz="1200" b="0">
+                <a:solidFill>
+                  <a:srgbClr val="FFFFFF"/>
+                </a:solidFill>
+                <a:latin typeface="微软雅黑" panose="020B0503020204020204" charset="-122"/>
+              </a:rPr>
+              <a:t>AFAC2026 · 5 分钟路演  ·  2026-07-08  ·  等待您的回音</a:t>
+            </a:r>
+            <a:endParaRPr sz="1200" b="0">
+              <a:solidFill>
+                <a:srgbClr val="FFFFFF"/>
+              </a:solidFill>
+              <a:latin typeface="微软雅黑" panose="020B0503020204020204" charset="-122"/>
+            </a:endParaRPr>
           </a:p>
         </p:txBody>
       </p:sp>
@@ -3628,8 +3674,8 @@
 </p:sld>
 </file>
 
-<file path=ppt/slides/slide11.xml><?xml version="1.0" encoding="utf-8"?>
-<p:sld xmlns:a="http://schemas.openxmlformats.org/drawingml/2006/main" xmlns:p="http://schemas.openxmlformats.org/presentationml/2006/main" xmlns:r="http://schemas.openxmlformats.org/officeDocument/2006/relationships">
+<file path=ppt/slides/slide2.xml><?xml version="1.0" encoding="utf-8"?>
+<p:sld xmlns:a="http://schemas.openxmlformats.org/drawingml/2006/main" xmlns:r="http://schemas.openxmlformats.org/officeDocument/2006/relationships" xmlns:p="http://schemas.openxmlformats.org/presentationml/2006/main">
   <p:cSld>
     <p:spTree>
       <p:nvGrpSpPr>
@@ -3647,7 +3693,7 @@
         <p:spPr>
           <a:xfrm>
             <a:off x="0" y="0"/>
-            <a:ext cx="12191695" cy="6858000"/>
+            <a:ext cx="12191695" cy="822960"/>
           </a:xfrm>
           <a:prstGeom prst="rect">
             <a:avLst/>
@@ -3689,8 +3735,90 @@
         </p:nvSpPr>
         <p:spPr>
           <a:xfrm>
-            <a:off x="457200" y="1097280"/>
-            <a:ext cx="11247120" cy="457200"/>
+            <a:off x="457200" y="91440"/>
+            <a:ext cx="10972800" cy="640080"/>
+          </a:xfrm>
+          <a:prstGeom prst="rect">
+            <a:avLst/>
+          </a:prstGeom>
+          <a:noFill/>
+        </p:spPr>
+        <p:txBody>
+          <a:bodyPr wrap="square" anchor="ctr">
+            <a:spAutoFit/>
+          </a:bodyPr>
+          <a:lstStyle/>
+          <a:p>
+            <a:pPr algn="l"/>
+            <a:r>
+              <a:rPr sz="2800" b="1">
+                <a:solidFill>
+                  <a:srgbClr val="FFFFFF"/>
+                </a:solidFill>
+                <a:latin typeface="微软雅黑" panose="020B0503020204020204" charset="-122"/>
+              </a:rPr>
+              <a:t>Hook | 90% 中小私募 跑不赢基准</a:t>
+            </a:r>
+            <a:endParaRPr sz="2800" b="1">
+              <a:solidFill>
+                <a:srgbClr val="FFFFFF"/>
+              </a:solidFill>
+              <a:latin typeface="微软雅黑" panose="020B0503020204020204" charset="-122"/>
+            </a:endParaRPr>
+          </a:p>
+        </p:txBody>
+      </p:sp>
+      <p:sp>
+        <p:nvSpPr>
+          <p:cNvPr id="4" name="TextBox 3"/>
+          <p:cNvSpPr txBox="1"/>
+          <p:nvPr/>
+        </p:nvSpPr>
+        <p:spPr>
+          <a:xfrm>
+            <a:off x="457200" y="502920"/>
+            <a:ext cx="10972800" cy="274320"/>
+          </a:xfrm>
+          <a:prstGeom prst="rect">
+            <a:avLst/>
+          </a:prstGeom>
+          <a:noFill/>
+        </p:spPr>
+        <p:txBody>
+          <a:bodyPr wrap="square" anchor="ctr">
+            <a:spAutoFit/>
+          </a:bodyPr>
+          <a:lstStyle/>
+          <a:p>
+            <a:pPr algn="l"/>
+            <a:r>
+              <a:rPr sz="1200" b="0">
+                <a:solidFill>
+                  <a:srgbClr val="FFFFFF"/>
+                </a:solidFill>
+                <a:latin typeface="微软雅黑" panose="020B0503020204020204" charset="-122"/>
+              </a:rPr>
+              <a:t>中小私募买不起 Wind · 90% 跑不赢基准</a:t>
+            </a:r>
+            <a:endParaRPr sz="1200" b="0">
+              <a:solidFill>
+                <a:srgbClr val="FFFFFF"/>
+              </a:solidFill>
+              <a:latin typeface="微软雅黑" panose="020B0503020204020204" charset="-122"/>
+            </a:endParaRPr>
+          </a:p>
+        </p:txBody>
+      </p:sp>
+      <p:sp>
+        <p:nvSpPr>
+          <p:cNvPr id="5" name="TextBox 4"/>
+          <p:cNvSpPr txBox="1"/>
+          <p:nvPr/>
+        </p:nvSpPr>
+        <p:spPr>
+          <a:xfrm>
+            <a:off x="457200" y="6537960"/>
+            <a:ext cx="11247120" cy="274320"/>
           </a:xfrm>
           <a:prstGeom prst="rect">
             <a:avLst/>
@@ -3705,27 +3833,33 @@
           <a:p>
             <a:pPr algn="ctr"/>
             <a:r>
-              <a:rPr sz="2200" b="0">
-                <a:solidFill>
-                  <a:srgbClr val="FFFFFF"/>
-                </a:solidFill>
-                <a:latin typeface="Microsoft YaHei"/>
-              </a:rPr>
-              <a:t>愿景 | Vision</a:t>
-            </a:r>
-          </a:p>
-        </p:txBody>
-      </p:sp>
-      <p:sp>
-        <p:nvSpPr>
-          <p:cNvPr id="4" name="TextBox 3"/>
+              <a:rPr sz="1000" b="0">
+                <a:solidFill>
+                  <a:srgbClr val="888888"/>
+                </a:solidFill>
+                <a:latin typeface="微软雅黑" panose="020B0503020204020204" charset="-122"/>
+              </a:rPr>
+              <a:t>AFAC2026 · 5 分钟路演  |  QuantInsight Pro</a:t>
+            </a:r>
+            <a:endParaRPr sz="1000" b="0">
+              <a:solidFill>
+                <a:srgbClr val="888888"/>
+              </a:solidFill>
+              <a:latin typeface="微软雅黑" panose="020B0503020204020204" charset="-122"/>
+            </a:endParaRPr>
+          </a:p>
+        </p:txBody>
+      </p:sp>
+      <p:sp>
+        <p:nvSpPr>
+          <p:cNvPr id="6" name="TextBox 5"/>
           <p:cNvSpPr txBox="1"/>
           <p:nvPr/>
         </p:nvSpPr>
         <p:spPr>
           <a:xfrm>
-            <a:off x="457200" y="2011680"/>
-            <a:ext cx="11247120" cy="1097280"/>
+            <a:off x="457200" y="1280160"/>
+            <a:ext cx="11247120" cy="548640"/>
           </a:xfrm>
           <a:prstGeom prst="rect">
             <a:avLst/>
@@ -3738,193 +3872,41 @@
           </a:bodyPr>
           <a:lstStyle/>
           <a:p>
-            <a:pPr algn="ctr"/>
-            <a:r>
-              <a:rPr sz="4600" b="1">
-                <a:solidFill>
-                  <a:srgbClr val="FFFFFF"/>
-                </a:solidFill>
-                <a:latin typeface="Microsoft YaHei"/>
-              </a:rPr>
-              <a:t>让 1.5 万家中小私募</a:t>
-            </a:r>
-          </a:p>
-        </p:txBody>
-      </p:sp>
-      <p:sp>
-        <p:nvSpPr>
-          <p:cNvPr id="5" name="TextBox 4"/>
-          <p:cNvSpPr txBox="1"/>
-          <p:nvPr/>
-        </p:nvSpPr>
-        <p:spPr>
-          <a:xfrm>
-            <a:off x="457200" y="3108960"/>
-            <a:ext cx="11247120" cy="1097280"/>
-          </a:xfrm>
-          <a:prstGeom prst="rect">
-            <a:avLst/>
-          </a:prstGeom>
-          <a:noFill/>
-        </p:spPr>
-        <p:txBody>
-          <a:bodyPr wrap="square" anchor="t">
-            <a:spAutoFit/>
-          </a:bodyPr>
-          <a:lstStyle/>
-          <a:p>
-            <a:pPr algn="ctr"/>
-            <a:r>
-              <a:rPr sz="4600" b="1">
-                <a:solidFill>
-                  <a:srgbClr val="FFFFFF"/>
-                </a:solidFill>
-                <a:latin typeface="Microsoft YaHei"/>
-              </a:rPr>
-              <a:t>0 成本拥有 AI 投研能力</a:t>
-            </a:r>
-          </a:p>
-        </p:txBody>
-      </p:sp>
-      <p:sp>
-        <p:nvSpPr>
-          <p:cNvPr id="6" name="TextBox 5"/>
-          <p:cNvSpPr txBox="1"/>
-          <p:nvPr/>
-        </p:nvSpPr>
-        <p:spPr>
-          <a:xfrm>
-            <a:off x="457200" y="4389120"/>
-            <a:ext cx="11247120" cy="457200"/>
-          </a:xfrm>
-          <a:prstGeom prst="rect">
-            <a:avLst/>
-          </a:prstGeom>
-          <a:noFill/>
-        </p:spPr>
-        <p:txBody>
-          <a:bodyPr wrap="square" anchor="t">
-            <a:spAutoFit/>
-          </a:bodyPr>
-          <a:lstStyle/>
-          <a:p>
-            <a:pPr algn="ctr"/>
-            <a:r>
-              <a:rPr sz="1800" b="0">
-                <a:solidFill>
-                  <a:srgbClr val="FFFFFF"/>
-                </a:solidFill>
-                <a:latin typeface="Microsoft YaHei"/>
-              </a:rPr>
-              <a:t>QuantInsight Pro 团队 · 冯亦根 / 王宇寒 / 官馨 / 梁理智</a:t>
-            </a:r>
-          </a:p>
-        </p:txBody>
-      </p:sp>
-      <p:sp>
-        <p:nvSpPr>
-          <p:cNvPr id="7" name="TextBox 6"/>
-          <p:cNvSpPr txBox="1"/>
-          <p:nvPr/>
-        </p:nvSpPr>
-        <p:spPr>
-          <a:xfrm>
-            <a:off x="457200" y="5029200"/>
-            <a:ext cx="11247120" cy="457200"/>
-          </a:xfrm>
-          <a:prstGeom prst="rect">
-            <a:avLst/>
-          </a:prstGeom>
-          <a:noFill/>
-        </p:spPr>
-        <p:txBody>
-          <a:bodyPr wrap="square" anchor="t">
-            <a:spAutoFit/>
-          </a:bodyPr>
-          <a:lstStyle/>
-          <a:p>
-            <a:pPr algn="ctr"/>
-            <a:r>
-              <a:rPr sz="1600" b="0">
-                <a:solidFill>
-                  <a:srgbClr val="FFFFFF"/>
-                </a:solidFill>
-                <a:latin typeface="Microsoft YaHei"/>
-              </a:rPr>
-              <a:t>SHAP 可解释  ·  11.4 年回测  ·  永字资管 POC</a:t>
-            </a:r>
-          </a:p>
-        </p:txBody>
-      </p:sp>
-      <p:sp>
-        <p:nvSpPr>
-          <p:cNvPr id="8" name="TextBox 7"/>
-          <p:cNvSpPr txBox="1"/>
-          <p:nvPr/>
-        </p:nvSpPr>
-        <p:spPr>
-          <a:xfrm>
-            <a:off x="457200" y="6035040"/>
-            <a:ext cx="11247120" cy="365760"/>
-          </a:xfrm>
-          <a:prstGeom prst="rect">
-            <a:avLst/>
-          </a:prstGeom>
-          <a:noFill/>
-        </p:spPr>
-        <p:txBody>
-          <a:bodyPr wrap="square" anchor="t">
-            <a:spAutoFit/>
-          </a:bodyPr>
-          <a:lstStyle/>
-          <a:p>
-            <a:pPr algn="ctr"/>
-            <a:r>
-              <a:rPr sz="1200" b="0">
-                <a:solidFill>
-                  <a:srgbClr val="FFFFFF"/>
-                </a:solidFill>
-                <a:latin typeface="Microsoft YaHei"/>
-              </a:rPr>
-              <a:t>AFAC2026 · 5 分钟路演  ·  2026-07-08  ·  等待您的回音</a:t>
-            </a:r>
-          </a:p>
-        </p:txBody>
-      </p:sp>
-    </p:spTree>
-  </p:cSld>
-  <p:clrMapOvr>
-    <a:masterClrMapping/>
-  </p:clrMapOvr>
-</p:sld>
-</file>
-
-<file path=ppt/slides/slide2.xml><?xml version="1.0" encoding="utf-8"?>
-<p:sld xmlns:a="http://schemas.openxmlformats.org/drawingml/2006/main" xmlns:p="http://schemas.openxmlformats.org/presentationml/2006/main" xmlns:r="http://schemas.openxmlformats.org/officeDocument/2006/relationships">
-  <p:cSld>
-    <p:spTree>
-      <p:nvGrpSpPr>
-        <p:cNvPr id="1" name=""/>
-        <p:cNvGrpSpPr/>
-        <p:nvPr/>
-      </p:nvGrpSpPr>
-      <p:grpSpPr/>
-      <p:sp>
-        <p:nvSpPr>
-          <p:cNvPr id="2" name="Rectangle 1"/>
+            <a:pPr algn="l"/>
+            <a:r>
+              <a:rPr sz="2000" b="0">
+                <a:solidFill>
+                  <a:srgbClr val="1A1A1A"/>
+                </a:solidFill>
+                <a:latin typeface="微软雅黑" panose="020B0503020204020204" charset="-122"/>
+              </a:rPr>
+              <a:t>中国资管规模 200 万亿，其中 1.5 万家中小私募：</a:t>
+            </a:r>
+            <a:endParaRPr sz="2000" b="0">
+              <a:solidFill>
+                <a:srgbClr val="1A1A1A"/>
+              </a:solidFill>
+              <a:latin typeface="微软雅黑" panose="020B0503020204020204" charset="-122"/>
+            </a:endParaRPr>
+          </a:p>
+        </p:txBody>
+      </p:sp>
+      <p:sp>
+        <p:nvSpPr>
+          <p:cNvPr id="7" name="Rectangle 6"/>
           <p:cNvSpPr/>
           <p:nvPr/>
         </p:nvSpPr>
         <p:spPr>
           <a:xfrm>
-            <a:off x="0" y="0"/>
-            <a:ext cx="12191695" cy="822960"/>
+            <a:off x="914400" y="2103120"/>
+            <a:ext cx="10332720" cy="1463040"/>
           </a:xfrm>
           <a:prstGeom prst="rect">
             <a:avLst/>
           </a:prstGeom>
           <a:solidFill>
-            <a:srgbClr val="1F77B4"/>
+            <a:srgbClr val="D62728"/>
           </a:solidFill>
           <a:ln>
             <a:noFill/>
@@ -3954,84 +3936,14 @@
       </p:sp>
       <p:sp>
         <p:nvSpPr>
-          <p:cNvPr id="3" name="TextBox 2"/>
+          <p:cNvPr id="8" name="TextBox 7"/>
           <p:cNvSpPr txBox="1"/>
           <p:nvPr/>
         </p:nvSpPr>
         <p:spPr>
           <a:xfrm>
-            <a:off x="457200" y="91440"/>
-            <a:ext cx="10972800" cy="640080"/>
-          </a:xfrm>
-          <a:prstGeom prst="rect">
-            <a:avLst/>
-          </a:prstGeom>
-          <a:noFill/>
-        </p:spPr>
-        <p:txBody>
-          <a:bodyPr wrap="square" anchor="ctr">
-            <a:spAutoFit/>
-          </a:bodyPr>
-          <a:lstStyle/>
-          <a:p>
-            <a:pPr algn="l"/>
-            <a:r>
-              <a:rPr sz="2800" b="1">
-                <a:solidFill>
-                  <a:srgbClr val="FFFFFF"/>
-                </a:solidFill>
-                <a:latin typeface="Microsoft YaHei"/>
-              </a:rPr>
-              <a:t>Hook | 90% 中小私募 跑不赢基准</a:t>
-            </a:r>
-          </a:p>
-        </p:txBody>
-      </p:sp>
-      <p:sp>
-        <p:nvSpPr>
-          <p:cNvPr id="4" name="TextBox 3"/>
-          <p:cNvSpPr txBox="1"/>
-          <p:nvPr/>
-        </p:nvSpPr>
-        <p:spPr>
-          <a:xfrm>
-            <a:off x="457200" y="502920"/>
-            <a:ext cx="10972800" cy="274320"/>
-          </a:xfrm>
-          <a:prstGeom prst="rect">
-            <a:avLst/>
-          </a:prstGeom>
-          <a:noFill/>
-        </p:spPr>
-        <p:txBody>
-          <a:bodyPr wrap="square" anchor="ctr">
-            <a:spAutoFit/>
-          </a:bodyPr>
-          <a:lstStyle/>
-          <a:p>
-            <a:pPr algn="l"/>
-            <a:r>
-              <a:rPr sz="1200" b="0">
-                <a:solidFill>
-                  <a:srgbClr val="FFFFFF"/>
-                </a:solidFill>
-                <a:latin typeface="Microsoft YaHei"/>
-              </a:rPr>
-              <a:t>中小私募买不起 Wind · 90% 跑不赢基准</a:t>
-            </a:r>
-          </a:p>
-        </p:txBody>
-      </p:sp>
-      <p:sp>
-        <p:nvSpPr>
-          <p:cNvPr id="5" name="TextBox 4"/>
-          <p:cNvSpPr txBox="1"/>
-          <p:nvPr/>
-        </p:nvSpPr>
-        <p:spPr>
-          <a:xfrm>
-            <a:off x="457200" y="6537960"/>
-            <a:ext cx="11247120" cy="274320"/>
+            <a:off x="914400" y="2240280"/>
+            <a:ext cx="10332720" cy="548640"/>
           </a:xfrm>
           <a:prstGeom prst="rect">
             <a:avLst/>
@@ -4046,27 +3958,33 @@
           <a:p>
             <a:pPr algn="ctr"/>
             <a:r>
-              <a:rPr sz="1000" b="0">
-                <a:solidFill>
-                  <a:srgbClr val="888888"/>
-                </a:solidFill>
-                <a:latin typeface="Microsoft YaHei"/>
-              </a:rPr>
-              <a:t>AFAC2026 · 5 分钟路演  |  QuantInsight Pro</a:t>
-            </a:r>
-          </a:p>
-        </p:txBody>
-      </p:sp>
-      <p:sp>
-        <p:nvSpPr>
-          <p:cNvPr id="6" name="TextBox 5"/>
+              <a:rPr sz="3600" b="1">
+                <a:solidFill>
+                  <a:srgbClr val="FFFFFF"/>
+                </a:solidFill>
+                <a:latin typeface="微软雅黑" panose="020B0503020204020204" charset="-122"/>
+              </a:rPr>
+              <a:t>中小私募 90% 跑不赢基准</a:t>
+            </a:r>
+            <a:endParaRPr sz="3600" b="1">
+              <a:solidFill>
+                <a:srgbClr val="FFFFFF"/>
+              </a:solidFill>
+              <a:latin typeface="微软雅黑" panose="020B0503020204020204" charset="-122"/>
+            </a:endParaRPr>
+          </a:p>
+        </p:txBody>
+      </p:sp>
+      <p:sp>
+        <p:nvSpPr>
+          <p:cNvPr id="9" name="TextBox 8"/>
           <p:cNvSpPr txBox="1"/>
           <p:nvPr/>
         </p:nvSpPr>
         <p:spPr>
           <a:xfrm>
-            <a:off x="457200" y="1280160"/>
-            <a:ext cx="11247120" cy="548640"/>
+            <a:off x="914400" y="2880360"/>
+            <a:ext cx="10332720" cy="548640"/>
           </a:xfrm>
           <a:prstGeom prst="rect">
             <a:avLst/>
@@ -4079,35 +3997,189 @@
           </a:bodyPr>
           <a:lstStyle/>
           <a:p>
+            <a:pPr algn="ctr"/>
+            <a:r>
+              <a:rPr sz="2200" b="0">
+                <a:solidFill>
+                  <a:srgbClr val="FFFFFF"/>
+                </a:solidFill>
+                <a:latin typeface="微软雅黑" panose="020B0503020204020204" charset="-122"/>
+              </a:rPr>
+              <a:t>Wind + 优矿 + 团队 = 500 万/年，中小私募根本买不起</a:t>
+            </a:r>
+            <a:endParaRPr sz="2200" b="0">
+              <a:solidFill>
+                <a:srgbClr val="FFFFFF"/>
+              </a:solidFill>
+              <a:latin typeface="微软雅黑" panose="020B0503020204020204" charset="-122"/>
+            </a:endParaRPr>
+          </a:p>
+        </p:txBody>
+      </p:sp>
+      <p:sp>
+        <p:nvSpPr>
+          <p:cNvPr id="10" name="TextBox 9"/>
+          <p:cNvSpPr txBox="1"/>
+          <p:nvPr/>
+        </p:nvSpPr>
+        <p:spPr>
+          <a:xfrm>
+            <a:off x="457200" y="4023360"/>
+            <a:ext cx="11247120" cy="457200"/>
+          </a:xfrm>
+          <a:prstGeom prst="rect">
+            <a:avLst/>
+          </a:prstGeom>
+          <a:noFill/>
+        </p:spPr>
+        <p:txBody>
+          <a:bodyPr wrap="square" anchor="t">
+            <a:spAutoFit/>
+          </a:bodyPr>
+          <a:lstStyle/>
+          <a:p>
             <a:pPr algn="l"/>
             <a:r>
-              <a:rPr sz="2000" b="0">
+              <a:rPr sz="2200" b="1">
+                <a:solidFill>
+                  <a:srgbClr val="1F77B4"/>
+                </a:solidFill>
+                <a:latin typeface="微软雅黑" panose="020B0503020204020204" charset="-122"/>
+              </a:rPr>
+              <a:t>结果：</a:t>
+            </a:r>
+            <a:endParaRPr sz="2200" b="1">
+              <a:solidFill>
+                <a:srgbClr val="1F77B4"/>
+              </a:solidFill>
+              <a:latin typeface="微软雅黑" panose="020B0503020204020204" charset="-122"/>
+            </a:endParaRPr>
+          </a:p>
+        </p:txBody>
+      </p:sp>
+      <p:sp>
+        <p:nvSpPr>
+          <p:cNvPr id="11" name="TextBox 10"/>
+          <p:cNvSpPr txBox="1"/>
+          <p:nvPr/>
+        </p:nvSpPr>
+        <p:spPr>
+          <a:xfrm>
+            <a:off x="731520" y="4572000"/>
+            <a:ext cx="10515600" cy="1828800"/>
+          </a:xfrm>
+          <a:prstGeom prst="rect">
+            <a:avLst/>
+          </a:prstGeom>
+          <a:noFill/>
+        </p:spPr>
+        <p:txBody>
+          <a:bodyPr wrap="square">
+            <a:spAutoFit/>
+          </a:bodyPr>
+          <a:lstStyle/>
+          <a:p>
+            <a:pPr algn="l">
+              <a:spcAft>
+                <a:spcPts val="600"/>
+              </a:spcAft>
+            </a:pPr>
+            <a:r>
+              <a:rPr sz="2000">
                 <a:solidFill>
                   <a:srgbClr val="1A1A1A"/>
                 </a:solidFill>
-                <a:latin typeface="Microsoft YaHei"/>
-              </a:rPr>
-              <a:t>中国资管规模 200 万亿，其中 1.5 万家中小私募：</a:t>
-            </a:r>
-          </a:p>
-        </p:txBody>
-      </p:sp>
-      <p:sp>
-        <p:nvSpPr>
-          <p:cNvPr id="7" name="Rectangle 6"/>
+                <a:latin typeface="微软雅黑" panose="020B0503020204020204" charset="-122"/>
+              </a:rPr>
+              <a:t>• ① 90% 中小私募跑不赢基准 —— AI 投研是 0</a:t>
+            </a:r>
+            <a:endParaRPr sz="2000">
+              <a:solidFill>
+                <a:srgbClr val="1A1A1A"/>
+              </a:solidFill>
+              <a:latin typeface="微软雅黑" panose="020B0503020204020204" charset="-122"/>
+            </a:endParaRPr>
+          </a:p>
+          <a:p>
+            <a:pPr algn="l">
+              <a:spcAft>
+                <a:spcPts val="600"/>
+              </a:spcAft>
+            </a:pPr>
+            <a:r>
+              <a:rPr sz="2000">
+                <a:solidFill>
+                  <a:srgbClr val="1A1A1A"/>
+                </a:solidFill>
+                <a:latin typeface="微软雅黑" panose="020B0503020204020204" charset="-122"/>
+              </a:rPr>
+              <a:t>• ② 500 万/年的工具门槛 —— 99% 中小私募用 Excel + 人工研判</a:t>
+            </a:r>
+            <a:endParaRPr sz="2000">
+              <a:solidFill>
+                <a:srgbClr val="1A1A1A"/>
+              </a:solidFill>
+              <a:latin typeface="微软雅黑" panose="020B0503020204020204" charset="-122"/>
+            </a:endParaRPr>
+          </a:p>
+          <a:p>
+            <a:pPr algn="l">
+              <a:spcAft>
+                <a:spcPts val="600"/>
+              </a:spcAft>
+            </a:pPr>
+            <a:r>
+              <a:rPr sz="2000">
+                <a:solidFill>
+                  <a:srgbClr val="1A1A1A"/>
+                </a:solidFill>
+                <a:latin typeface="微软雅黑" panose="020B0503020204020204" charset="-122"/>
+              </a:rPr>
+              <a:t>• ③ 1.5 万家 × 50 万/年 —— 75 亿/年的 TAM，QuantInsight 切入</a:t>
+            </a:r>
+            <a:endParaRPr sz="2000">
+              <a:solidFill>
+                <a:srgbClr val="1A1A1A"/>
+              </a:solidFill>
+              <a:latin typeface="微软雅黑" panose="020B0503020204020204" charset="-122"/>
+            </a:endParaRPr>
+          </a:p>
+        </p:txBody>
+      </p:sp>
+    </p:spTree>
+  </p:cSld>
+  <p:clrMapOvr>
+    <a:masterClrMapping/>
+  </p:clrMapOvr>
+</p:sld>
+</file>
+
+<file path=ppt/slides/slide3.xml><?xml version="1.0" encoding="utf-8"?>
+<p:sld xmlns:a="http://schemas.openxmlformats.org/drawingml/2006/main" xmlns:r="http://schemas.openxmlformats.org/officeDocument/2006/relationships" xmlns:p="http://schemas.openxmlformats.org/presentationml/2006/main">
+  <p:cSld>
+    <p:spTree>
+      <p:nvGrpSpPr>
+        <p:cNvPr id="1" name=""/>
+        <p:cNvGrpSpPr/>
+        <p:nvPr/>
+      </p:nvGrpSpPr>
+      <p:grpSpPr/>
+      <p:sp>
+        <p:nvSpPr>
+          <p:cNvPr id="2" name="Rectangle 1"/>
           <p:cNvSpPr/>
           <p:nvPr/>
         </p:nvSpPr>
         <p:spPr>
           <a:xfrm>
-            <a:off x="914400" y="2103120"/>
-            <a:ext cx="10332720" cy="1463040"/>
+            <a:off x="0" y="0"/>
+            <a:ext cx="12191695" cy="822960"/>
           </a:xfrm>
           <a:prstGeom prst="rect">
             <a:avLst/>
           </a:prstGeom>
           <a:solidFill>
-            <a:srgbClr val="D62728"/>
+            <a:srgbClr val="1F77B4"/>
           </a:solidFill>
           <a:ln>
             <a:noFill/>
@@ -4137,14 +4209,96 @@
       </p:sp>
       <p:sp>
         <p:nvSpPr>
-          <p:cNvPr id="8" name="TextBox 7"/>
+          <p:cNvPr id="3" name="TextBox 2"/>
           <p:cNvSpPr txBox="1"/>
           <p:nvPr/>
         </p:nvSpPr>
         <p:spPr>
           <a:xfrm>
-            <a:off x="914400" y="2240280"/>
-            <a:ext cx="10332720" cy="548640"/>
+            <a:off x="457200" y="91440"/>
+            <a:ext cx="10972800" cy="640080"/>
+          </a:xfrm>
+          <a:prstGeom prst="rect">
+            <a:avLst/>
+          </a:prstGeom>
+          <a:noFill/>
+        </p:spPr>
+        <p:txBody>
+          <a:bodyPr wrap="square" anchor="ctr">
+            <a:spAutoFit/>
+          </a:bodyPr>
+          <a:lstStyle/>
+          <a:p>
+            <a:pPr algn="l"/>
+            <a:r>
+              <a:rPr sz="2800" b="1">
+                <a:solidFill>
+                  <a:srgbClr val="FFFFFF"/>
+                </a:solidFill>
+                <a:latin typeface="微软雅黑" panose="020B0503020204020204" charset="-122"/>
+              </a:rPr>
+              <a:t>痛点 &amp; 方案 | 4 大痛点 + 3 大核心</a:t>
+            </a:r>
+            <a:endParaRPr sz="2800" b="1">
+              <a:solidFill>
+                <a:srgbClr val="FFFFFF"/>
+              </a:solidFill>
+              <a:latin typeface="微软雅黑" panose="020B0503020204020204" charset="-122"/>
+            </a:endParaRPr>
+          </a:p>
+        </p:txBody>
+      </p:sp>
+      <p:sp>
+        <p:nvSpPr>
+          <p:cNvPr id="4" name="TextBox 3"/>
+          <p:cNvSpPr txBox="1"/>
+          <p:nvPr/>
+        </p:nvSpPr>
+        <p:spPr>
+          <a:xfrm>
+            <a:off x="457200" y="502920"/>
+            <a:ext cx="10972800" cy="274320"/>
+          </a:xfrm>
+          <a:prstGeom prst="rect">
+            <a:avLst/>
+          </a:prstGeom>
+          <a:noFill/>
+        </p:spPr>
+        <p:txBody>
+          <a:bodyPr wrap="square" anchor="ctr">
+            <a:spAutoFit/>
+          </a:bodyPr>
+          <a:lstStyle/>
+          <a:p>
+            <a:pPr algn="l"/>
+            <a:r>
+              <a:rPr sz="1200" b="0">
+                <a:solidFill>
+                  <a:srgbClr val="FFFFFF"/>
+                </a:solidFill>
+                <a:latin typeface="微软雅黑" panose="020B0503020204020204" charset="-122"/>
+              </a:rPr>
+              <a:t>中小私募的 AI 投研困境 vs 我们的应对</a:t>
+            </a:r>
+            <a:endParaRPr sz="1200" b="0">
+              <a:solidFill>
+                <a:srgbClr val="FFFFFF"/>
+              </a:solidFill>
+              <a:latin typeface="微软雅黑" panose="020B0503020204020204" charset="-122"/>
+            </a:endParaRPr>
+          </a:p>
+        </p:txBody>
+      </p:sp>
+      <p:sp>
+        <p:nvSpPr>
+          <p:cNvPr id="5" name="TextBox 4"/>
+          <p:cNvSpPr txBox="1"/>
+          <p:nvPr/>
+        </p:nvSpPr>
+        <p:spPr>
+          <a:xfrm>
+            <a:off x="457200" y="6537960"/>
+            <a:ext cx="11247120" cy="274320"/>
           </a:xfrm>
           <a:prstGeom prst="rect">
             <a:avLst/>
@@ -4159,27 +4313,33 @@
           <a:p>
             <a:pPr algn="ctr"/>
             <a:r>
-              <a:rPr sz="3600" b="1">
-                <a:solidFill>
-                  <a:srgbClr val="FFFFFF"/>
-                </a:solidFill>
-                <a:latin typeface="Microsoft YaHei"/>
-              </a:rPr>
-              <a:t>中小私募 90% 跑不赢基准</a:t>
-            </a:r>
-          </a:p>
-        </p:txBody>
-      </p:sp>
-      <p:sp>
-        <p:nvSpPr>
-          <p:cNvPr id="9" name="TextBox 8"/>
+              <a:rPr sz="1000" b="0">
+                <a:solidFill>
+                  <a:srgbClr val="888888"/>
+                </a:solidFill>
+                <a:latin typeface="微软雅黑" panose="020B0503020204020204" charset="-122"/>
+              </a:rPr>
+              <a:t>AFAC2026 · 5 分钟路演  |  QuantInsight Pro</a:t>
+            </a:r>
+            <a:endParaRPr sz="1000" b="0">
+              <a:solidFill>
+                <a:srgbClr val="888888"/>
+              </a:solidFill>
+              <a:latin typeface="微软雅黑" panose="020B0503020204020204" charset="-122"/>
+            </a:endParaRPr>
+          </a:p>
+        </p:txBody>
+      </p:sp>
+      <p:sp>
+        <p:nvSpPr>
+          <p:cNvPr id="6" name="TextBox 5"/>
           <p:cNvSpPr txBox="1"/>
           <p:nvPr/>
         </p:nvSpPr>
         <p:spPr>
           <a:xfrm>
-            <a:off x="914400" y="2880360"/>
-            <a:ext cx="10332720" cy="548640"/>
+            <a:off x="457200" y="1097280"/>
+            <a:ext cx="5486400" cy="457200"/>
           </a:xfrm>
           <a:prstGeom prst="rect">
             <a:avLst/>
@@ -4192,64 +4352,35 @@
           </a:bodyPr>
           <a:lstStyle/>
           <a:p>
-            <a:pPr algn="ctr"/>
-            <a:r>
-              <a:rPr sz="2200" b="0">
-                <a:solidFill>
-                  <a:srgbClr val="FFFFFF"/>
-                </a:solidFill>
-                <a:latin typeface="Microsoft YaHei"/>
-              </a:rPr>
-              <a:t>Wind + 优矿 + 团队 = 500 万/年，中小私募根本买不起</a:t>
-            </a:r>
-          </a:p>
-        </p:txBody>
-      </p:sp>
-      <p:sp>
-        <p:nvSpPr>
-          <p:cNvPr id="10" name="TextBox 9"/>
+            <a:pPr algn="l"/>
+            <a:r>
+              <a:rPr sz="2200" b="1">
+                <a:solidFill>
+                  <a:srgbClr val="D62728"/>
+                </a:solidFill>
+                <a:latin typeface="微软雅黑" panose="020B0503020204020204" charset="-122"/>
+              </a:rPr>
+              <a:t>4 大痛点：</a:t>
+            </a:r>
+            <a:endParaRPr sz="2200" b="1">
+              <a:solidFill>
+                <a:srgbClr val="D62728"/>
+              </a:solidFill>
+              <a:latin typeface="微软雅黑" panose="020B0503020204020204" charset="-122"/>
+            </a:endParaRPr>
+          </a:p>
+        </p:txBody>
+      </p:sp>
+      <p:sp>
+        <p:nvSpPr>
+          <p:cNvPr id="7" name="TextBox 6"/>
           <p:cNvSpPr txBox="1"/>
           <p:nvPr/>
         </p:nvSpPr>
         <p:spPr>
           <a:xfrm>
-            <a:off x="457200" y="4023360"/>
-            <a:ext cx="11247120" cy="457200"/>
-          </a:xfrm>
-          <a:prstGeom prst="rect">
-            <a:avLst/>
-          </a:prstGeom>
-          <a:noFill/>
-        </p:spPr>
-        <p:txBody>
-          <a:bodyPr wrap="square" anchor="t">
-            <a:spAutoFit/>
-          </a:bodyPr>
-          <a:lstStyle/>
-          <a:p>
-            <a:pPr algn="l"/>
-            <a:r>
-              <a:rPr sz="2200" b="1">
-                <a:solidFill>
-                  <a:srgbClr val="1F77B4"/>
-                </a:solidFill>
-                <a:latin typeface="Microsoft YaHei"/>
-              </a:rPr>
-              <a:t>结果：</a:t>
-            </a:r>
-          </a:p>
-        </p:txBody>
-      </p:sp>
-      <p:sp>
-        <p:nvSpPr>
-          <p:cNvPr id="11" name="TextBox 10"/>
-          <p:cNvSpPr txBox="1"/>
-          <p:nvPr/>
-        </p:nvSpPr>
-        <p:spPr>
-          <a:xfrm>
-            <a:off x="731520" y="4572000"/>
-            <a:ext cx="10515600" cy="1828800"/>
+            <a:off x="640080" y="1645920"/>
+            <a:ext cx="5303520" cy="4572000"/>
           </a:xfrm>
           <a:prstGeom prst="rect">
             <a:avLst/>
@@ -4268,14 +4399,20 @@
               </a:spcAft>
             </a:pPr>
             <a:r>
-              <a:rPr sz="2000">
+              <a:rPr sz="1800">
                 <a:solidFill>
                   <a:srgbClr val="1A1A1A"/>
                 </a:solidFill>
-                <a:latin typeface="Microsoft YaHei"/>
-              </a:rPr>
-              <a:t>• ① 90% 中小私募跑不赢基准 —— AI 投研是 0</a:t>
-            </a:r>
+                <a:latin typeface="微软雅黑" panose="020B0503020204020204" charset="-122"/>
+              </a:rPr>
+              <a:t>• ① 买不起：Wind 500 万/年</a:t>
+            </a:r>
+            <a:endParaRPr sz="1800">
+              <a:solidFill>
+                <a:srgbClr val="1A1A1A"/>
+              </a:solidFill>
+              <a:latin typeface="微软雅黑" panose="020B0503020204020204" charset="-122"/>
+            </a:endParaRPr>
           </a:p>
           <a:p>
             <a:pPr algn="l">
@@ -4284,14 +4421,20 @@
               </a:spcAft>
             </a:pPr>
             <a:r>
-              <a:rPr sz="2000">
+              <a:rPr sz="1800">
                 <a:solidFill>
                   <a:srgbClr val="1A1A1A"/>
                 </a:solidFill>
-                <a:latin typeface="Microsoft YaHei"/>
-              </a:rPr>
-              <a:t>• ② 500 万/年的工具门槛 —— 99% 中小私募用 Excel + 人工研判</a:t>
-            </a:r>
+                <a:latin typeface="微软雅黑" panose="020B0503020204020204" charset="-122"/>
+              </a:rPr>
+              <a:t>• ② 不会用：黑盒 AI 不可解释</a:t>
+            </a:r>
+            <a:endParaRPr sz="1800">
+              <a:solidFill>
+                <a:srgbClr val="1A1A1A"/>
+              </a:solidFill>
+              <a:latin typeface="微软雅黑" panose="020B0503020204020204" charset="-122"/>
+            </a:endParaRPr>
           </a:p>
           <a:p>
             <a:pPr algn="l">
@@ -4300,14 +4443,213 @@
               </a:spcAft>
             </a:pPr>
             <a:r>
-              <a:rPr sz="2000">
+              <a:rPr sz="1800">
                 <a:solidFill>
                   <a:srgbClr val="1A1A1A"/>
                 </a:solidFill>
-                <a:latin typeface="Microsoft YaHei"/>
-              </a:rPr>
-              <a:t>• ③ 1.5 万家 × 50 万/年 —— 75 亿/年的 TAM，QuantInsight 切入</a:t>
-            </a:r>
+                <a:latin typeface="微软雅黑" panose="020B0503020204020204" charset="-122"/>
+              </a:rPr>
+              <a:t>• ③ 没数据：另类数据散落</a:t>
+            </a:r>
+            <a:endParaRPr sz="1800">
+              <a:solidFill>
+                <a:srgbClr val="1A1A1A"/>
+              </a:solidFill>
+              <a:latin typeface="微软雅黑" panose="020B0503020204020204" charset="-122"/>
+            </a:endParaRPr>
+          </a:p>
+          <a:p>
+            <a:pPr algn="l">
+              <a:spcAft>
+                <a:spcPts val="600"/>
+              </a:spcAft>
+            </a:pPr>
+            <a:r>
+              <a:rPr sz="1800">
+                <a:solidFill>
+                  <a:srgbClr val="1A1A1A"/>
+                </a:solidFill>
+                <a:latin typeface="微软雅黑" panose="020B0503020204020204" charset="-122"/>
+              </a:rPr>
+              <a:t>• ④ 落不了：回测与实盘脱节</a:t>
+            </a:r>
+            <a:endParaRPr sz="1800">
+              <a:solidFill>
+                <a:srgbClr val="1A1A1A"/>
+              </a:solidFill>
+              <a:latin typeface="微软雅黑" panose="020B0503020204020204" charset="-122"/>
+            </a:endParaRPr>
+          </a:p>
+        </p:txBody>
+      </p:sp>
+      <p:sp>
+        <p:nvSpPr>
+          <p:cNvPr id="8" name="TextBox 7"/>
+          <p:cNvSpPr txBox="1"/>
+          <p:nvPr/>
+        </p:nvSpPr>
+        <p:spPr>
+          <a:xfrm>
+            <a:off x="6400800" y="1097280"/>
+            <a:ext cx="5486400" cy="457200"/>
+          </a:xfrm>
+          <a:prstGeom prst="rect">
+            <a:avLst/>
+          </a:prstGeom>
+          <a:noFill/>
+        </p:spPr>
+        <p:txBody>
+          <a:bodyPr wrap="square" anchor="t">
+            <a:spAutoFit/>
+          </a:bodyPr>
+          <a:lstStyle/>
+          <a:p>
+            <a:pPr algn="l"/>
+            <a:r>
+              <a:rPr sz="2200" b="1">
+                <a:solidFill>
+                  <a:srgbClr val="2CA02C"/>
+                </a:solidFill>
+                <a:latin typeface="微软雅黑" panose="020B0503020204020204" charset="-122"/>
+              </a:rPr>
+              <a:t>3 大核心：</a:t>
+            </a:r>
+            <a:endParaRPr sz="2200" b="1">
+              <a:solidFill>
+                <a:srgbClr val="2CA02C"/>
+              </a:solidFill>
+              <a:latin typeface="微软雅黑" panose="020B0503020204020204" charset="-122"/>
+            </a:endParaRPr>
+          </a:p>
+        </p:txBody>
+      </p:sp>
+      <p:sp>
+        <p:nvSpPr>
+          <p:cNvPr id="9" name="TextBox 8"/>
+          <p:cNvSpPr txBox="1"/>
+          <p:nvPr/>
+        </p:nvSpPr>
+        <p:spPr>
+          <a:xfrm>
+            <a:off x="6583680" y="1645920"/>
+            <a:ext cx="5303520" cy="4572000"/>
+          </a:xfrm>
+          <a:prstGeom prst="rect">
+            <a:avLst/>
+          </a:prstGeom>
+          <a:noFill/>
+        </p:spPr>
+        <p:txBody>
+          <a:bodyPr wrap="square">
+            <a:spAutoFit/>
+          </a:bodyPr>
+          <a:lstStyle/>
+          <a:p>
+            <a:pPr algn="l">
+              <a:spcAft>
+                <a:spcPts val="600"/>
+              </a:spcAft>
+            </a:pPr>
+            <a:r>
+              <a:rPr sz="1800">
+                <a:solidFill>
+                  <a:srgbClr val="1A1A1A"/>
+                </a:solidFill>
+                <a:latin typeface="微软雅黑" panose="020B0503020204020204" charset="-122"/>
+              </a:rPr>
+              <a:t>• ① 透明：SHAP 归因，监管友好</a:t>
+            </a:r>
+            <a:endParaRPr sz="1800">
+              <a:solidFill>
+                <a:srgbClr val="1A1A1A"/>
+              </a:solidFill>
+              <a:latin typeface="微软雅黑" panose="020B0503020204020204" charset="-122"/>
+            </a:endParaRPr>
+          </a:p>
+          <a:p>
+            <a:pPr algn="l">
+              <a:spcAft>
+                <a:spcPts val="600"/>
+              </a:spcAft>
+            </a:pPr>
+            <a:r>
+              <a:rPr sz="1800">
+                <a:solidFill>
+                  <a:srgbClr val="1A1A1A"/>
+                </a:solidFill>
+                <a:latin typeface="微软雅黑" panose="020B0503020204020204" charset="-122"/>
+              </a:rPr>
+              <a:t>• ② 可证：11.4 年 POC 回测</a:t>
+            </a:r>
+            <a:endParaRPr sz="1800">
+              <a:solidFill>
+                <a:srgbClr val="1A1A1A"/>
+              </a:solidFill>
+              <a:latin typeface="微软雅黑" panose="020B0503020204020204" charset="-122"/>
+            </a:endParaRPr>
+          </a:p>
+          <a:p>
+            <a:pPr algn="l">
+              <a:spcAft>
+                <a:spcPts val="600"/>
+              </a:spcAft>
+            </a:pPr>
+            <a:r>
+              <a:rPr sz="1800">
+                <a:solidFill>
+                  <a:srgbClr val="1A1A1A"/>
+                </a:solidFill>
+                <a:latin typeface="微软雅黑" panose="020B0503020204020204" charset="-122"/>
+              </a:rPr>
+              <a:t>• ③ 可负担：2.4 万/年（Wind 的 1/200）</a:t>
+            </a:r>
+            <a:endParaRPr sz="1800">
+              <a:solidFill>
+                <a:srgbClr val="1A1A1A"/>
+              </a:solidFill>
+              <a:latin typeface="微软雅黑" panose="020B0503020204020204" charset="-122"/>
+            </a:endParaRPr>
+          </a:p>
+        </p:txBody>
+      </p:sp>
+      <p:sp>
+        <p:nvSpPr>
+          <p:cNvPr id="10" name="TextBox 9"/>
+          <p:cNvSpPr txBox="1"/>
+          <p:nvPr/>
+        </p:nvSpPr>
+        <p:spPr>
+          <a:xfrm>
+            <a:off x="457200" y="6126480"/>
+            <a:ext cx="11247120" cy="365760"/>
+          </a:xfrm>
+          <a:prstGeom prst="rect">
+            <a:avLst/>
+          </a:prstGeom>
+          <a:noFill/>
+        </p:spPr>
+        <p:txBody>
+          <a:bodyPr wrap="square" anchor="t">
+            <a:spAutoFit/>
+          </a:bodyPr>
+          <a:lstStyle/>
+          <a:p>
+            <a:pPr algn="ctr"/>
+            <a:r>
+              <a:rPr sz="1800" b="1">
+                <a:solidFill>
+                  <a:srgbClr val="1F77B4"/>
+                </a:solidFill>
+                <a:latin typeface="微软雅黑" panose="020B0503020204020204" charset="-122"/>
+              </a:rPr>
+              <a:t>现状 → 方案：QuantInsight Pro = SHAP 可解释 AI + 11.4 年回测 + 2.4 万/年</a:t>
+            </a:r>
+            <a:endParaRPr sz="1800" b="1">
+              <a:solidFill>
+                <a:srgbClr val="1F77B4"/>
+              </a:solidFill>
+              <a:latin typeface="微软雅黑" panose="020B0503020204020204" charset="-122"/>
+            </a:endParaRPr>
           </a:p>
         </p:txBody>
       </p:sp>
@@ -4319,8 +4661,8 @@
 </p:sld>
 </file>
 
-<file path=ppt/slides/slide3.xml><?xml version="1.0" encoding="utf-8"?>
-<p:sld xmlns:a="http://schemas.openxmlformats.org/drawingml/2006/main" xmlns:p="http://schemas.openxmlformats.org/presentationml/2006/main" xmlns:r="http://schemas.openxmlformats.org/officeDocument/2006/relationships">
+<file path=ppt/slides/slide4.xml><?xml version="1.0" encoding="utf-8"?>
+<p:sld xmlns:a="http://schemas.openxmlformats.org/drawingml/2006/main" xmlns:r="http://schemas.openxmlformats.org/officeDocument/2006/relationships" xmlns:p="http://schemas.openxmlformats.org/presentationml/2006/main">
   <p:cSld>
     <p:spTree>
       <p:nvGrpSpPr>
@@ -4400,10 +4742,16 @@
                 <a:solidFill>
                   <a:srgbClr val="FFFFFF"/>
                 </a:solidFill>
-                <a:latin typeface="Microsoft YaHei"/>
-              </a:rPr>
-              <a:t>痛点 &amp; 方案 | 4 大痛点 + 3 大核心</a:t>
-            </a:r>
+                <a:latin typeface="微软雅黑" panose="020B0503020204020204" charset="-122"/>
+              </a:rPr>
+              <a:t>技术 | SHAP 可解释 AI（核心壁垒）</a:t>
+            </a:r>
+            <a:endParaRPr sz="2800" b="1">
+              <a:solidFill>
+                <a:srgbClr val="FFFFFF"/>
+              </a:solidFill>
+              <a:latin typeface="微软雅黑" panose="020B0503020204020204" charset="-122"/>
+            </a:endParaRPr>
           </a:p>
         </p:txBody>
       </p:sp>
@@ -4435,10 +4783,16 @@
                 <a:solidFill>
                   <a:srgbClr val="FFFFFF"/>
                 </a:solidFill>
-                <a:latin typeface="Microsoft YaHei"/>
-              </a:rPr>
-              <a:t>中小私募的 AI 投研困境 vs 我们的应对</a:t>
-            </a:r>
+                <a:latin typeface="微软雅黑" panose="020B0503020204020204" charset="-122"/>
+              </a:rPr>
+              <a:t>5 大壁垒 · 17 因子 · 3 模态融合 · MIT 开源</a:t>
+            </a:r>
+            <a:endParaRPr sz="1200" b="0">
+              <a:solidFill>
+                <a:srgbClr val="FFFFFF"/>
+              </a:solidFill>
+              <a:latin typeface="微软雅黑" panose="020B0503020204020204" charset="-122"/>
+            </a:endParaRPr>
           </a:p>
         </p:txBody>
       </p:sp>
@@ -4470,23 +4824,53 @@
                 <a:solidFill>
                   <a:srgbClr val="888888"/>
                 </a:solidFill>
-                <a:latin typeface="Microsoft YaHei"/>
+                <a:latin typeface="微软雅黑" panose="020B0503020204020204" charset="-122"/>
               </a:rPr>
               <a:t>AFAC2026 · 5 分钟路演  |  QuantInsight Pro</a:t>
             </a:r>
-          </a:p>
-        </p:txBody>
-      </p:sp>
-      <p:sp>
-        <p:nvSpPr>
-          <p:cNvPr id="6" name="TextBox 5"/>
+            <a:endParaRPr sz="1000" b="0">
+              <a:solidFill>
+                <a:srgbClr val="888888"/>
+              </a:solidFill>
+              <a:latin typeface="微软雅黑" panose="020B0503020204020204" charset="-122"/>
+            </a:endParaRPr>
+          </a:p>
+        </p:txBody>
+      </p:sp>
+      <p:pic>
+        <p:nvPicPr>
+          <p:cNvPr id="6" name="Picture 5" descr="02_ltv_cac_radar.png"/>
+          <p:cNvPicPr>
+            <a:picLocks noChangeAspect="1"/>
+          </p:cNvPicPr>
+          <p:nvPr/>
+        </p:nvPicPr>
+        <p:blipFill>
+          <a:blip r:embed="rId1"/>
+          <a:stretch>
+            <a:fillRect/>
+          </a:stretch>
+        </p:blipFill>
+        <p:spPr>
+          <a:xfrm>
+            <a:off x="457200" y="1005840"/>
+            <a:ext cx="6858000" cy="5528837"/>
+          </a:xfrm>
+          <a:prstGeom prst="rect">
+            <a:avLst/>
+          </a:prstGeom>
+        </p:spPr>
+      </p:pic>
+      <p:sp>
+        <p:nvSpPr>
+          <p:cNvPr id="7" name="TextBox 6"/>
           <p:cNvSpPr txBox="1"/>
           <p:nvPr/>
         </p:nvSpPr>
         <p:spPr>
           <a:xfrm>
-            <a:off x="457200" y="1097280"/>
-            <a:ext cx="5486400" cy="457200"/>
+            <a:off x="7589520" y="1188720"/>
+            <a:ext cx="4389120" cy="457200"/>
           </a:xfrm>
           <a:prstGeom prst="rect">
             <a:avLst/>
@@ -4501,27 +4885,33 @@
           <a:p>
             <a:pPr algn="l"/>
             <a:r>
-              <a:rPr sz="2200" b="1">
-                <a:solidFill>
-                  <a:srgbClr val="D62728"/>
-                </a:solidFill>
-                <a:latin typeface="Microsoft YaHei"/>
-              </a:rPr>
-              <a:t>4 大痛点：</a:t>
-            </a:r>
-          </a:p>
-        </p:txBody>
-      </p:sp>
-      <p:sp>
-        <p:nvSpPr>
-          <p:cNvPr id="7" name="TextBox 6"/>
+              <a:rPr sz="2000" b="1">
+                <a:solidFill>
+                  <a:srgbClr val="1F77B4"/>
+                </a:solidFill>
+                <a:latin typeface="微软雅黑" panose="020B0503020204020204" charset="-122"/>
+              </a:rPr>
+              <a:t>5 大技术壁垒：</a:t>
+            </a:r>
+            <a:endParaRPr sz="2000" b="1">
+              <a:solidFill>
+                <a:srgbClr val="1F77B4"/>
+              </a:solidFill>
+              <a:latin typeface="微软雅黑" panose="020B0503020204020204" charset="-122"/>
+            </a:endParaRPr>
+          </a:p>
+        </p:txBody>
+      </p:sp>
+      <p:sp>
+        <p:nvSpPr>
+          <p:cNvPr id="8" name="TextBox 7"/>
           <p:cNvSpPr txBox="1"/>
           <p:nvPr/>
         </p:nvSpPr>
         <p:spPr>
           <a:xfrm>
-            <a:off x="640080" y="1645920"/>
-            <a:ext cx="5303520" cy="4572000"/>
+            <a:off x="7589520" y="1737360"/>
+            <a:ext cx="4389120" cy="4572000"/>
           </a:xfrm>
           <a:prstGeom prst="rect">
             <a:avLst/>
@@ -4542,12 +4932,18 @@
             <a:r>
               <a:rPr sz="1800">
                 <a:solidFill>
-                  <a:srgbClr val="1A1A1A"/>
-                </a:solidFill>
-                <a:latin typeface="Microsoft YaHei"/>
-              </a:rPr>
-              <a:t>• ① 买不起：Wind 500 万/年</a:t>
-            </a:r>
+                  <a:srgbClr val="2CA02C"/>
+                </a:solidFill>
+                <a:latin typeface="微软雅黑" panose="020B0503020204020204" charset="-122"/>
+              </a:rPr>
+              <a:t>• ① SHAP 归因（业内独家）</a:t>
+            </a:r>
+            <a:endParaRPr sz="1800">
+              <a:solidFill>
+                <a:srgbClr val="2CA02C"/>
+              </a:solidFill>
+              <a:latin typeface="微软雅黑" panose="020B0503020204020204" charset="-122"/>
+            </a:endParaRPr>
           </a:p>
           <a:p>
             <a:pPr algn="l">
@@ -4558,12 +4954,18 @@
             <a:r>
               <a:rPr sz="1800">
                 <a:solidFill>
-                  <a:srgbClr val="1A1A1A"/>
-                </a:solidFill>
-                <a:latin typeface="Microsoft YaHei"/>
-              </a:rPr>
-              <a:t>• ② 不会用：黑盒 AI 不可解释</a:t>
-            </a:r>
+                  <a:srgbClr val="2CA02C"/>
+                </a:solidFill>
+                <a:latin typeface="微软雅黑" panose="020B0503020204020204" charset="-122"/>
+              </a:rPr>
+              <a:t>• ② 11.4 年回测（业内最长）</a:t>
+            </a:r>
+            <a:endParaRPr sz="1800">
+              <a:solidFill>
+                <a:srgbClr val="2CA02C"/>
+              </a:solidFill>
+              <a:latin typeface="微软雅黑" panose="020B0503020204020204" charset="-122"/>
+            </a:endParaRPr>
           </a:p>
           <a:p>
             <a:pPr algn="l">
@@ -4574,12 +4976,18 @@
             <a:r>
               <a:rPr sz="1800">
                 <a:solidFill>
-                  <a:srgbClr val="1A1A1A"/>
-                </a:solidFill>
-                <a:latin typeface="Microsoft YaHei"/>
-              </a:rPr>
-              <a:t>• ③ 没数据：另类数据散落</a:t>
-            </a:r>
+                  <a:srgbClr val="2CA02C"/>
+                </a:solidFill>
+                <a:latin typeface="微软雅黑" panose="020B0503020204020204" charset="-122"/>
+              </a:rPr>
+              <a:t>• ③ 17 因子库（业内最全）</a:t>
+            </a:r>
+            <a:endParaRPr sz="1800">
+              <a:solidFill>
+                <a:srgbClr val="2CA02C"/>
+              </a:solidFill>
+              <a:latin typeface="微软雅黑" panose="020B0503020204020204" charset="-122"/>
+            </a:endParaRPr>
           </a:p>
           <a:p>
             <a:pPr algn="l">
@@ -4590,71 +4998,19 @@
             <a:r>
               <a:rPr sz="1800">
                 <a:solidFill>
-                  <a:srgbClr val="1A1A1A"/>
-                </a:solidFill>
-                <a:latin typeface="Microsoft YaHei"/>
-              </a:rPr>
-              <a:t>• ④ 落不了：回测与实盘脱节</a:t>
-            </a:r>
-          </a:p>
-        </p:txBody>
-      </p:sp>
-      <p:sp>
-        <p:nvSpPr>
-          <p:cNvPr id="8" name="TextBox 7"/>
-          <p:cNvSpPr txBox="1"/>
-          <p:nvPr/>
-        </p:nvSpPr>
-        <p:spPr>
-          <a:xfrm>
-            <a:off x="6400800" y="1097280"/>
-            <a:ext cx="5486400" cy="457200"/>
-          </a:xfrm>
-          <a:prstGeom prst="rect">
-            <a:avLst/>
-          </a:prstGeom>
-          <a:noFill/>
-        </p:spPr>
-        <p:txBody>
-          <a:bodyPr wrap="square" anchor="t">
-            <a:spAutoFit/>
-          </a:bodyPr>
-          <a:lstStyle/>
-          <a:p>
-            <a:pPr algn="l"/>
-            <a:r>
-              <a:rPr sz="2200" b="1">
-                <a:solidFill>
                   <a:srgbClr val="2CA02C"/>
                 </a:solidFill>
-                <a:latin typeface="Microsoft YaHei"/>
-              </a:rPr>
-              <a:t>3 大核心：</a:t>
-            </a:r>
-          </a:p>
-        </p:txBody>
-      </p:sp>
-      <p:sp>
-        <p:nvSpPr>
-          <p:cNvPr id="9" name="TextBox 8"/>
-          <p:cNvSpPr txBox="1"/>
-          <p:nvPr/>
-        </p:nvSpPr>
-        <p:spPr>
-          <a:xfrm>
-            <a:off x="6583680" y="1645920"/>
-            <a:ext cx="5303520" cy="4572000"/>
-          </a:xfrm>
-          <a:prstGeom prst="rect">
-            <a:avLst/>
-          </a:prstGeom>
-          <a:noFill/>
-        </p:spPr>
-        <p:txBody>
-          <a:bodyPr wrap="square">
-            <a:spAutoFit/>
-          </a:bodyPr>
-          <a:lstStyle/>
+                <a:latin typeface="微软雅黑" panose="020B0503020204020204" charset="-122"/>
+              </a:rPr>
+              <a:t>• ④ 3 模态融合（舆情/资金/政策）</a:t>
+            </a:r>
+            <a:endParaRPr sz="1800">
+              <a:solidFill>
+                <a:srgbClr val="2CA02C"/>
+              </a:solidFill>
+              <a:latin typeface="微软雅黑" panose="020B0503020204020204" charset="-122"/>
+            </a:endParaRPr>
+          </a:p>
           <a:p>
             <a:pPr algn="l">
               <a:spcAft>
@@ -4664,57 +5020,31 @@
             <a:r>
               <a:rPr sz="1800">
                 <a:solidFill>
-                  <a:srgbClr val="1A1A1A"/>
-                </a:solidFill>
-                <a:latin typeface="Microsoft YaHei"/>
-              </a:rPr>
-              <a:t>• ① 透明：SHAP 归因，监管友好</a:t>
-            </a:r>
-          </a:p>
-          <a:p>
-            <a:pPr algn="l">
-              <a:spcAft>
-                <a:spcPts val="600"/>
-              </a:spcAft>
-            </a:pPr>
-            <a:r>
-              <a:rPr sz="1800">
-                <a:solidFill>
-                  <a:srgbClr val="1A1A1A"/>
-                </a:solidFill>
-                <a:latin typeface="Microsoft YaHei"/>
-              </a:rPr>
-              <a:t>• ② 可证：11.4 年 POC 回测</a:t>
-            </a:r>
-          </a:p>
-          <a:p>
-            <a:pPr algn="l">
-              <a:spcAft>
-                <a:spcPts val="600"/>
-              </a:spcAft>
-            </a:pPr>
-            <a:r>
-              <a:rPr sz="1800">
-                <a:solidFill>
-                  <a:srgbClr val="1A1A1A"/>
-                </a:solidFill>
-                <a:latin typeface="Microsoft YaHei"/>
-              </a:rPr>
-              <a:t>• ③ 可负担：2.4 万/年（Wind 的 1/200）</a:t>
-            </a:r>
-          </a:p>
-        </p:txBody>
-      </p:sp>
-      <p:sp>
-        <p:nvSpPr>
-          <p:cNvPr id="10" name="TextBox 9"/>
+                  <a:srgbClr val="2CA02C"/>
+                </a:solidFill>
+                <a:latin typeface="微软雅黑" panose="020B0503020204020204" charset="-122"/>
+              </a:rPr>
+              <a:t>• ⑤ MIT 开源 + 软著</a:t>
+            </a:r>
+            <a:endParaRPr sz="1800">
+              <a:solidFill>
+                <a:srgbClr val="2CA02C"/>
+              </a:solidFill>
+              <a:latin typeface="微软雅黑" panose="020B0503020204020204" charset="-122"/>
+            </a:endParaRPr>
+          </a:p>
+        </p:txBody>
+      </p:sp>
+      <p:sp>
+        <p:nvSpPr>
+          <p:cNvPr id="9" name="TextBox 8"/>
           <p:cNvSpPr txBox="1"/>
           <p:nvPr/>
         </p:nvSpPr>
         <p:spPr>
           <a:xfrm>
-            <a:off x="457200" y="6126480"/>
-            <a:ext cx="11247120" cy="365760"/>
+            <a:off x="5120005" y="5276215"/>
+            <a:ext cx="8142605" cy="1258570"/>
           </a:xfrm>
           <a:prstGeom prst="rect">
             <a:avLst/>
@@ -4723,20 +5053,44 @@
         </p:spPr>
         <p:txBody>
           <a:bodyPr wrap="square" anchor="t">
-            <a:spAutoFit/>
+            <a:noAutofit/>
           </a:bodyPr>
           <a:lstStyle/>
           <a:p>
             <a:pPr algn="ctr"/>
             <a:r>
-              <a:rPr sz="1800" b="1">
-                <a:solidFill>
-                  <a:srgbClr val="1F77B4"/>
-                </a:solidFill>
-                <a:latin typeface="Microsoft YaHei"/>
-              </a:rPr>
-              <a:t>现状 → 方案：QuantInsight Pro = SHAP 可解释 AI + 11.4 年回测 + 2.4 万/年</a:t>
-            </a:r>
+              <a:rPr sz="1600" b="0">
+                <a:solidFill>
+                  <a:srgbClr val="FF0000"/>
+                </a:solidFill>
+                <a:latin typeface="微软雅黑" panose="020B0503020204020204" charset="-122"/>
+              </a:rPr>
+              <a:t>21/21 单元测试 100% PASS  ·  </a:t>
+            </a:r>
+            <a:endParaRPr sz="1600" b="0">
+              <a:solidFill>
+                <a:srgbClr val="FF0000"/>
+              </a:solidFill>
+              <a:latin typeface="微软雅黑" panose="020B0503020204020204" charset="-122"/>
+            </a:endParaRPr>
+          </a:p>
+          <a:p>
+            <a:pPr algn="ctr"/>
+            <a:r>
+              <a:rPr sz="1600" b="0">
+                <a:solidFill>
+                  <a:srgbClr val="FF0000"/>
+                </a:solidFill>
+                <a:latin typeface="微软雅黑" panose="020B0503020204020204" charset="-122"/>
+              </a:rPr>
+              <a:t>客户信任：永字资管 POC 5 只产品</a:t>
+            </a:r>
+            <a:endParaRPr sz="1600" b="0">
+              <a:solidFill>
+                <a:srgbClr val="FF0000"/>
+              </a:solidFill>
+              <a:latin typeface="微软雅黑" panose="020B0503020204020204" charset="-122"/>
+            </a:endParaRPr>
           </a:p>
         </p:txBody>
       </p:sp>
@@ -4748,8 +5102,8 @@
 </p:sld>
 </file>
 
-<file path=ppt/slides/slide4.xml><?xml version="1.0" encoding="utf-8"?>
-<p:sld xmlns:a="http://schemas.openxmlformats.org/drawingml/2006/main" xmlns:p="http://schemas.openxmlformats.org/presentationml/2006/main" xmlns:r="http://schemas.openxmlformats.org/officeDocument/2006/relationships">
+<file path=ppt/slides/slide5.xml><?xml version="1.0" encoding="utf-8"?>
+<p:sld xmlns:a="http://schemas.openxmlformats.org/drawingml/2006/main" xmlns:r="http://schemas.openxmlformats.org/officeDocument/2006/relationships" xmlns:p="http://schemas.openxmlformats.org/presentationml/2006/main">
   <p:cSld>
     <p:spTree>
       <p:nvGrpSpPr>
@@ -4829,10 +5183,16 @@
                 <a:solidFill>
                   <a:srgbClr val="FFFFFF"/>
                 </a:solidFill>
-                <a:latin typeface="Microsoft YaHei"/>
-              </a:rPr>
-              <a:t>技术 | SHAP 可解释 AI（核心壁垒）</a:t>
-            </a:r>
+                <a:latin typeface="微软雅黑" panose="020B0503020204020204" charset="-122"/>
+              </a:rPr>
+              <a:t>回测 | 11.4 年 POC（T35 修正后）</a:t>
+            </a:r>
+            <a:endParaRPr sz="2800" b="1">
+              <a:solidFill>
+                <a:srgbClr val="FFFFFF"/>
+              </a:solidFill>
+              <a:latin typeface="微软雅黑" panose="020B0503020204020204" charset="-122"/>
+            </a:endParaRPr>
           </a:p>
         </p:txBody>
       </p:sp>
@@ -4864,10 +5224,16 @@
                 <a:solidFill>
                   <a:srgbClr val="FFFFFF"/>
                 </a:solidFill>
-                <a:latin typeface="Microsoft YaHei"/>
-              </a:rPr>
-              <a:t>5 大壁垒 · 17 因子 · 3 模态融合 · MIT 开源</a:t>
-            </a:r>
+                <a:latin typeface="微软雅黑" panose="020B0503020204020204" charset="-122"/>
+              </a:rPr>
+              <a:t>HS300 8.56% / ZZ500 24.48% / CYB 11.55%</a:t>
+            </a:r>
+            <a:endParaRPr sz="1200" b="0">
+              <a:solidFill>
+                <a:srgbClr val="FFFFFF"/>
+              </a:solidFill>
+              <a:latin typeface="微软雅黑" panose="020B0503020204020204" charset="-122"/>
+            </a:endParaRPr>
           </a:p>
         </p:txBody>
       </p:sp>
@@ -4899,31 +5265,37 @@
                 <a:solidFill>
                   <a:srgbClr val="888888"/>
                 </a:solidFill>
-                <a:latin typeface="Microsoft YaHei"/>
+                <a:latin typeface="微软雅黑" panose="020B0503020204020204" charset="-122"/>
               </a:rPr>
               <a:t>AFAC2026 · 5 分钟路演  |  QuantInsight Pro</a:t>
             </a:r>
+            <a:endParaRPr sz="1000" b="0">
+              <a:solidFill>
+                <a:srgbClr val="888888"/>
+              </a:solidFill>
+              <a:latin typeface="微软雅黑" panose="020B0503020204020204" charset="-122"/>
+            </a:endParaRPr>
           </a:p>
         </p:txBody>
       </p:sp>
       <p:pic>
         <p:nvPicPr>
-          <p:cNvPr id="6" name="Picture 5" descr="02_ltv_cac_radar.png"/>
+          <p:cNvPr id="6" name="Picture 5" descr="04_backtest_curve.png"/>
           <p:cNvPicPr>
             <a:picLocks noChangeAspect="1"/>
           </p:cNvPicPr>
           <p:nvPr/>
         </p:nvPicPr>
         <p:blipFill>
-          <a:blip r:embed="rId2"/>
+          <a:blip r:embed="rId1"/>
           <a:stretch>
             <a:fillRect/>
           </a:stretch>
         </p:blipFill>
         <p:spPr>
           <a:xfrm>
-            <a:off x="457200" y="1005840"/>
-            <a:ext cx="6858000" cy="5528837"/>
+            <a:off x="274320" y="1097280"/>
+            <a:ext cx="7772400" cy="4527019"/>
           </a:xfrm>
           <a:prstGeom prst="rect">
             <a:avLst/>
@@ -4938,8 +5310,8 @@
         </p:nvSpPr>
         <p:spPr>
           <a:xfrm>
-            <a:off x="7589520" y="1188720"/>
-            <a:ext cx="4389120" cy="457200"/>
+            <a:off x="8229600" y="1371600"/>
+            <a:ext cx="3657600" cy="457200"/>
           </a:xfrm>
           <a:prstGeom prst="rect">
             <a:avLst/>
@@ -4954,14 +5326,20 @@
           <a:p>
             <a:pPr algn="l"/>
             <a:r>
-              <a:rPr sz="2000" b="1">
+              <a:rPr sz="1800" b="1">
                 <a:solidFill>
                   <a:srgbClr val="1F77B4"/>
                 </a:solidFill>
-                <a:latin typeface="Microsoft YaHei"/>
-              </a:rPr>
-              <a:t>5 大技术壁垒：</a:t>
-            </a:r>
+                <a:latin typeface="微软雅黑" panose="020B0503020204020204" charset="-122"/>
+              </a:rPr>
+              <a:t>3 指数 5 策略：</a:t>
+            </a:r>
+            <a:endParaRPr sz="1800" b="1">
+              <a:solidFill>
+                <a:srgbClr val="1F77B4"/>
+              </a:solidFill>
+              <a:latin typeface="微软雅黑" panose="020B0503020204020204" charset="-122"/>
+            </a:endParaRPr>
           </a:p>
         </p:txBody>
       </p:sp>
@@ -4973,8 +5351,8 @@
         </p:nvSpPr>
         <p:spPr>
           <a:xfrm>
-            <a:off x="7589520" y="1737360"/>
-            <a:ext cx="4389120" cy="4572000"/>
+            <a:off x="8229600" y="1920240"/>
+            <a:ext cx="3657600" cy="4572000"/>
           </a:xfrm>
           <a:prstGeom prst="rect">
             <a:avLst/>
@@ -4993,14 +5371,20 @@
               </a:spcAft>
             </a:pPr>
             <a:r>
-              <a:rPr sz="1800">
-                <a:solidFill>
-                  <a:srgbClr val="2CA02C"/>
-                </a:solidFill>
-                <a:latin typeface="Microsoft YaHei"/>
-              </a:rPr>
-              <a:t>• ① SHAP 归因（业内独家）</a:t>
-            </a:r>
+              <a:rPr sz="1600">
+                <a:solidFill>
+                  <a:srgbClr val="1A1A1A"/>
+                </a:solidFill>
+                <a:latin typeface="微软雅黑" panose="020B0503020204020204" charset="-122"/>
+              </a:rPr>
+              <a:t>• HS300 多因子  8.56%</a:t>
+            </a:r>
+            <a:endParaRPr sz="1600">
+              <a:solidFill>
+                <a:srgbClr val="1A1A1A"/>
+              </a:solidFill>
+              <a:latin typeface="微软雅黑" panose="020B0503020204020204" charset="-122"/>
+            </a:endParaRPr>
           </a:p>
           <a:p>
             <a:pPr algn="l">
@@ -5009,14 +5393,20 @@
               </a:spcAft>
             </a:pPr>
             <a:r>
-              <a:rPr sz="1800">
-                <a:solidFill>
-                  <a:srgbClr val="2CA02C"/>
-                </a:solidFill>
-                <a:latin typeface="Microsoft YaHei"/>
-              </a:rPr>
-              <a:t>• ② 11.4 年回测（业内最长）</a:t>
-            </a:r>
+              <a:rPr sz="1600">
+                <a:solidFill>
+                  <a:srgbClr val="1A1A1A"/>
+                </a:solidFill>
+                <a:latin typeface="微软雅黑" panose="020B0503020204020204" charset="-122"/>
+              </a:rPr>
+              <a:t>• 超越基准  +3.10pp</a:t>
+            </a:r>
+            <a:endParaRPr sz="1600">
+              <a:solidFill>
+                <a:srgbClr val="1A1A1A"/>
+              </a:solidFill>
+              <a:latin typeface="微软雅黑" panose="020B0503020204020204" charset="-122"/>
+            </a:endParaRPr>
           </a:p>
           <a:p>
             <a:pPr algn="l">
@@ -5025,14 +5415,20 @@
               </a:spcAft>
             </a:pPr>
             <a:r>
-              <a:rPr sz="1800">
-                <a:solidFill>
-                  <a:srgbClr val="2CA02C"/>
-                </a:solidFill>
-                <a:latin typeface="Microsoft YaHei"/>
-              </a:rPr>
-              <a:t>• ③ 17 因子库（业内最全）</a:t>
-            </a:r>
+              <a:rPr sz="1600">
+                <a:solidFill>
+                  <a:srgbClr val="1A1A1A"/>
+                </a:solidFill>
+                <a:latin typeface="微软雅黑" panose="020B0503020204020204" charset="-122"/>
+              </a:rPr>
+              <a:t>• ZZ500 多因子 24.48%</a:t>
+            </a:r>
+            <a:endParaRPr sz="1600">
+              <a:solidFill>
+                <a:srgbClr val="1A1A1A"/>
+              </a:solidFill>
+              <a:latin typeface="微软雅黑" panose="020B0503020204020204" charset="-122"/>
+            </a:endParaRPr>
           </a:p>
           <a:p>
             <a:pPr algn="l">
@@ -5041,14 +5437,20 @@
               </a:spcAft>
             </a:pPr>
             <a:r>
-              <a:rPr sz="1800">
-                <a:solidFill>
-                  <a:srgbClr val="2CA02C"/>
-                </a:solidFill>
-                <a:latin typeface="Microsoft YaHei"/>
-              </a:rPr>
-              <a:t>• ④ 3 模态融合（舆情/资金/政策）</a:t>
-            </a:r>
+              <a:rPr sz="1600">
+                <a:solidFill>
+                  <a:srgbClr val="1A1A1A"/>
+                </a:solidFill>
+                <a:latin typeface="微软雅黑" panose="020B0503020204020204" charset="-122"/>
+              </a:rPr>
+              <a:t>• CYB  多因子  11.55%</a:t>
+            </a:r>
+            <a:endParaRPr sz="1600">
+              <a:solidFill>
+                <a:srgbClr val="1A1A1A"/>
+              </a:solidFill>
+              <a:latin typeface="微软雅黑" panose="020B0503020204020204" charset="-122"/>
+            </a:endParaRPr>
           </a:p>
           <a:p>
             <a:pPr algn="l">
@@ -5057,14 +5459,42 @@
               </a:spcAft>
             </a:pPr>
             <a:r>
-              <a:rPr sz="1800">
-                <a:solidFill>
-                  <a:srgbClr val="2CA02C"/>
-                </a:solidFill>
-                <a:latin typeface="Microsoft YaHei"/>
-              </a:rPr>
-              <a:t>• ⑤ MIT 开源 + 软著</a:t>
-            </a:r>
+              <a:rPr sz="1600">
+                <a:solidFill>
+                  <a:srgbClr val="1A1A1A"/>
+                </a:solidFill>
+                <a:latin typeface="微软雅黑" panose="020B0503020204020204" charset="-122"/>
+              </a:rPr>
+              <a:t>• 修正前 19.22% → 修正后 8.56%</a:t>
+            </a:r>
+            <a:endParaRPr sz="1600">
+              <a:solidFill>
+                <a:srgbClr val="1A1A1A"/>
+              </a:solidFill>
+              <a:latin typeface="微软雅黑" panose="020B0503020204020204" charset="-122"/>
+            </a:endParaRPr>
+          </a:p>
+          <a:p>
+            <a:pPr algn="l">
+              <a:spcAft>
+                <a:spcPts val="600"/>
+              </a:spcAft>
+            </a:pPr>
+            <a:r>
+              <a:rPr sz="1600">
+                <a:solidFill>
+                  <a:srgbClr val="1A1A1A"/>
+                </a:solidFill>
+                <a:latin typeface="微软雅黑" panose="020B0503020204020204" charset="-122"/>
+              </a:rPr>
+              <a:t>• T35 引擎已 MIT 开源</a:t>
+            </a:r>
+            <a:endParaRPr sz="1600">
+              <a:solidFill>
+                <a:srgbClr val="1A1A1A"/>
+              </a:solidFill>
+              <a:latin typeface="微软雅黑" panose="020B0503020204020204" charset="-122"/>
+            </a:endParaRPr>
           </a:p>
         </p:txBody>
       </p:sp>
@@ -5092,14 +5522,20 @@
           <a:p>
             <a:pPr algn="ctr"/>
             <a:r>
-              <a:rPr sz="1600" b="0">
-                <a:solidFill>
-                  <a:srgbClr val="888888"/>
-                </a:solidFill>
-                <a:latin typeface="Microsoft YaHei"/>
-              </a:rPr>
-              <a:t>21/21 单元测试 100% PASS  ·  客户信任：永字资管 POC 5 只产品</a:t>
-            </a:r>
+              <a:rPr sz="1600" b="1">
+                <a:solidFill>
+                  <a:srgbClr val="2CA02C"/>
+                </a:solidFill>
+                <a:latin typeface="微软雅黑" panose="020B0503020204020204" charset="-122"/>
+              </a:rPr>
+              <a:t>最长时间窗口 + T35 修正 + MIT 开源 = 业内可信度第一</a:t>
+            </a:r>
+            <a:endParaRPr sz="1600" b="1">
+              <a:solidFill>
+                <a:srgbClr val="2CA02C"/>
+              </a:solidFill>
+              <a:latin typeface="微软雅黑" panose="020B0503020204020204" charset="-122"/>
+            </a:endParaRPr>
           </a:p>
         </p:txBody>
       </p:sp>
@@ -5111,8 +5547,8 @@
 </p:sld>
 </file>
 
-<file path=ppt/slides/slide5.xml><?xml version="1.0" encoding="utf-8"?>
-<p:sld xmlns:a="http://schemas.openxmlformats.org/drawingml/2006/main" xmlns:p="http://schemas.openxmlformats.org/presentationml/2006/main" xmlns:r="http://schemas.openxmlformats.org/officeDocument/2006/relationships">
+<file path=ppt/slides/slide6.xml><?xml version="1.0" encoding="utf-8"?>
+<p:sld xmlns:a="http://schemas.openxmlformats.org/drawingml/2006/main" xmlns:r="http://schemas.openxmlformats.org/officeDocument/2006/relationships" xmlns:p="http://schemas.openxmlformats.org/presentationml/2006/main">
   <p:cSld>
     <p:spTree>
       <p:nvGrpSpPr>
@@ -5192,10 +5628,16 @@
                 <a:solidFill>
                   <a:srgbClr val="FFFFFF"/>
                 </a:solidFill>
-                <a:latin typeface="Microsoft YaHei"/>
-              </a:rPr>
-              <a:t>回测 | 11.4 年 POC（T35 修正后）</a:t>
-            </a:r>
+                <a:latin typeface="微软雅黑" panose="020B0503020204020204" charset="-122"/>
+              </a:rPr>
+              <a:t>客户案例 | 永字资管战略合作</a:t>
+            </a:r>
+            <a:endParaRPr sz="2800" b="1">
+              <a:solidFill>
+                <a:srgbClr val="FFFFFF"/>
+              </a:solidFill>
+              <a:latin typeface="微软雅黑" panose="020B0503020204020204" charset="-122"/>
+            </a:endParaRPr>
           </a:p>
         </p:txBody>
       </p:sp>
@@ -5227,10 +5669,16 @@
                 <a:solidFill>
                   <a:srgbClr val="FFFFFF"/>
                 </a:solidFill>
-                <a:latin typeface="Microsoft YaHei"/>
-              </a:rPr>
-              <a:t>HS300 8.56% / ZZ500 24.48% / CYB 11.55%</a:t>
-            </a:r>
+                <a:latin typeface="微软雅黑" panose="020B0503020204020204" charset="-122"/>
+              </a:rPr>
+              <a:t>2026-05 签署  ·  POC 5 只产品  ·  节省 70% 成本</a:t>
+            </a:r>
+            <a:endParaRPr sz="1200" b="0">
+              <a:solidFill>
+                <a:srgbClr val="FFFFFF"/>
+              </a:solidFill>
+              <a:latin typeface="微软雅黑" panose="020B0503020204020204" charset="-122"/>
+            </a:endParaRPr>
           </a:p>
         </p:txBody>
       </p:sp>
@@ -5262,47 +5710,29 @@
                 <a:solidFill>
                   <a:srgbClr val="888888"/>
                 </a:solidFill>
-                <a:latin typeface="Microsoft YaHei"/>
+                <a:latin typeface="微软雅黑" panose="020B0503020204020204" charset="-122"/>
               </a:rPr>
               <a:t>AFAC2026 · 5 分钟路演  |  QuantInsight Pro</a:t>
             </a:r>
-          </a:p>
-        </p:txBody>
-      </p:sp>
-      <p:pic>
-        <p:nvPicPr>
-          <p:cNvPr id="6" name="Picture 5" descr="04_backtest_curve.png"/>
-          <p:cNvPicPr>
-            <a:picLocks noChangeAspect="1"/>
-          </p:cNvPicPr>
-          <p:nvPr/>
-        </p:nvPicPr>
-        <p:blipFill>
-          <a:blip r:embed="rId2"/>
-          <a:stretch>
-            <a:fillRect/>
-          </a:stretch>
-        </p:blipFill>
-        <p:spPr>
-          <a:xfrm>
-            <a:off x="274320" y="1097280"/>
-            <a:ext cx="7772400" cy="4527019"/>
-          </a:xfrm>
-          <a:prstGeom prst="rect">
-            <a:avLst/>
-          </a:prstGeom>
-        </p:spPr>
-      </p:pic>
-      <p:sp>
-        <p:nvSpPr>
-          <p:cNvPr id="7" name="TextBox 6"/>
+            <a:endParaRPr sz="1000" b="0">
+              <a:solidFill>
+                <a:srgbClr val="888888"/>
+              </a:solidFill>
+              <a:latin typeface="微软雅黑" panose="020B0503020204020204" charset="-122"/>
+            </a:endParaRPr>
+          </a:p>
+        </p:txBody>
+      </p:sp>
+      <p:sp>
+        <p:nvSpPr>
+          <p:cNvPr id="6" name="TextBox 5"/>
           <p:cNvSpPr txBox="1"/>
           <p:nvPr/>
         </p:nvSpPr>
         <p:spPr>
           <a:xfrm>
-            <a:off x="8229600" y="1371600"/>
-            <a:ext cx="3657600" cy="457200"/>
+            <a:off x="457200" y="1280160"/>
+            <a:ext cx="11247120" cy="548640"/>
           </a:xfrm>
           <a:prstGeom prst="rect">
             <a:avLst/>
@@ -5315,207 +5745,41 @@
           </a:bodyPr>
           <a:lstStyle/>
           <a:p>
-            <a:pPr algn="l"/>
-            <a:r>
-              <a:rPr sz="1800" b="1">
+            <a:pPr algn="ctr"/>
+            <a:r>
+              <a:rPr sz="2200" b="1">
                 <a:solidFill>
                   <a:srgbClr val="1F77B4"/>
                 </a:solidFill>
-                <a:latin typeface="Microsoft YaHei"/>
-              </a:rPr>
-              <a:t>3 指数 5 策略：</a:t>
-            </a:r>
-          </a:p>
-        </p:txBody>
-      </p:sp>
-      <p:sp>
-        <p:nvSpPr>
-          <p:cNvPr id="8" name="TextBox 7"/>
-          <p:cNvSpPr txBox="1"/>
-          <p:nvPr/>
-        </p:nvSpPr>
-        <p:spPr>
-          <a:xfrm>
-            <a:off x="8229600" y="1920240"/>
-            <a:ext cx="3657600" cy="4572000"/>
-          </a:xfrm>
-          <a:prstGeom prst="rect">
-            <a:avLst/>
-          </a:prstGeom>
-          <a:noFill/>
-        </p:spPr>
-        <p:txBody>
-          <a:bodyPr wrap="square">
-            <a:spAutoFit/>
-          </a:bodyPr>
-          <a:lstStyle/>
-          <a:p>
-            <a:pPr algn="l">
-              <a:spcAft>
-                <a:spcPts val="600"/>
-              </a:spcAft>
-            </a:pPr>
-            <a:r>
-              <a:rPr sz="1600">
-                <a:solidFill>
-                  <a:srgbClr val="1A1A1A"/>
-                </a:solidFill>
-                <a:latin typeface="Microsoft YaHei"/>
-              </a:rPr>
-              <a:t>• HS300 多因子  8.56%</a:t>
-            </a:r>
-          </a:p>
-          <a:p>
-            <a:pPr algn="l">
-              <a:spcAft>
-                <a:spcPts val="600"/>
-              </a:spcAft>
-            </a:pPr>
-            <a:r>
-              <a:rPr sz="1600">
-                <a:solidFill>
-                  <a:srgbClr val="1A1A1A"/>
-                </a:solidFill>
-                <a:latin typeface="Microsoft YaHei"/>
-              </a:rPr>
-              <a:t>• 超越基准  +3.10pp</a:t>
-            </a:r>
-          </a:p>
-          <a:p>
-            <a:pPr algn="l">
-              <a:spcAft>
-                <a:spcPts val="600"/>
-              </a:spcAft>
-            </a:pPr>
-            <a:r>
-              <a:rPr sz="1600">
-                <a:solidFill>
-                  <a:srgbClr val="1A1A1A"/>
-                </a:solidFill>
-                <a:latin typeface="Microsoft YaHei"/>
-              </a:rPr>
-              <a:t>• ZZ500 多因子 24.48%</a:t>
-            </a:r>
-          </a:p>
-          <a:p>
-            <a:pPr algn="l">
-              <a:spcAft>
-                <a:spcPts val="600"/>
-              </a:spcAft>
-            </a:pPr>
-            <a:r>
-              <a:rPr sz="1600">
-                <a:solidFill>
-                  <a:srgbClr val="1A1A1A"/>
-                </a:solidFill>
-                <a:latin typeface="Microsoft YaHei"/>
-              </a:rPr>
-              <a:t>• CYB  多因子  11.55%</a:t>
-            </a:r>
-          </a:p>
-          <a:p>
-            <a:pPr algn="l">
-              <a:spcAft>
-                <a:spcPts val="600"/>
-              </a:spcAft>
-            </a:pPr>
-            <a:r>
-              <a:rPr sz="1600">
-                <a:solidFill>
-                  <a:srgbClr val="1A1A1A"/>
-                </a:solidFill>
-                <a:latin typeface="Microsoft YaHei"/>
-              </a:rPr>
-              <a:t>• 修正前 19.22% → 修正后 8.56%</a:t>
-            </a:r>
-          </a:p>
-          <a:p>
-            <a:pPr algn="l">
-              <a:spcAft>
-                <a:spcPts val="600"/>
-              </a:spcAft>
-            </a:pPr>
-            <a:r>
-              <a:rPr sz="1600">
-                <a:solidFill>
-                  <a:srgbClr val="1A1A1A"/>
-                </a:solidFill>
-                <a:latin typeface="Microsoft YaHei"/>
-              </a:rPr>
-              <a:t>• T35 引擎已 MIT 开源</a:t>
-            </a:r>
-          </a:p>
-        </p:txBody>
-      </p:sp>
-      <p:sp>
-        <p:nvSpPr>
-          <p:cNvPr id="9" name="TextBox 8"/>
-          <p:cNvSpPr txBox="1"/>
-          <p:nvPr/>
-        </p:nvSpPr>
-        <p:spPr>
-          <a:xfrm>
-            <a:off x="457200" y="6126480"/>
-            <a:ext cx="11247120" cy="365760"/>
-          </a:xfrm>
-          <a:prstGeom prst="rect">
-            <a:avLst/>
-          </a:prstGeom>
-          <a:noFill/>
-        </p:spPr>
-        <p:txBody>
-          <a:bodyPr wrap="square" anchor="t">
-            <a:spAutoFit/>
-          </a:bodyPr>
-          <a:lstStyle/>
-          <a:p>
-            <a:pPr algn="ctr"/>
-            <a:r>
-              <a:rPr sz="1600" b="1">
-                <a:solidFill>
-                  <a:srgbClr val="2CA02C"/>
-                </a:solidFill>
-                <a:latin typeface="Microsoft YaHei"/>
-              </a:rPr>
-              <a:t>最长时间窗口 + T35 修正 + MIT 开源 = 业内可信度第一</a:t>
-            </a:r>
-          </a:p>
-        </p:txBody>
-      </p:sp>
-    </p:spTree>
-  </p:cSld>
-  <p:clrMapOvr>
-    <a:masterClrMapping/>
-  </p:clrMapOvr>
-</p:sld>
-</file>
-
-<file path=ppt/slides/slide6.xml><?xml version="1.0" encoding="utf-8"?>
-<p:sld xmlns:a="http://schemas.openxmlformats.org/drawingml/2006/main" xmlns:p="http://schemas.openxmlformats.org/presentationml/2006/main" xmlns:r="http://schemas.openxmlformats.org/officeDocument/2006/relationships">
-  <p:cSld>
-    <p:spTree>
-      <p:nvGrpSpPr>
-        <p:cNvPr id="1" name=""/>
-        <p:cNvGrpSpPr/>
-        <p:nvPr/>
-      </p:nvGrpSpPr>
-      <p:grpSpPr/>
-      <p:sp>
-        <p:nvSpPr>
-          <p:cNvPr id="2" name="Rectangle 1"/>
+                <a:latin typeface="微软雅黑" panose="020B0503020204020204" charset="-122"/>
+              </a:rPr>
+              <a:t>永字资管（薛永再 · 推荐单位 · 非参赛队员）</a:t>
+            </a:r>
+            <a:endParaRPr sz="2200" b="1">
+              <a:solidFill>
+                <a:srgbClr val="1F77B4"/>
+              </a:solidFill>
+              <a:latin typeface="微软雅黑" panose="020B0503020204020204" charset="-122"/>
+            </a:endParaRPr>
+          </a:p>
+        </p:txBody>
+      </p:sp>
+      <p:sp>
+        <p:nvSpPr>
+          <p:cNvPr id="7" name="Rectangle 6"/>
           <p:cNvSpPr/>
           <p:nvPr/>
         </p:nvSpPr>
         <p:spPr>
           <a:xfrm>
-            <a:off x="0" y="0"/>
-            <a:ext cx="12191695" cy="822960"/>
+            <a:off x="914400" y="2103120"/>
+            <a:ext cx="10332720" cy="1280160"/>
           </a:xfrm>
           <a:prstGeom prst="rect">
             <a:avLst/>
           </a:prstGeom>
           <a:solidFill>
-            <a:srgbClr val="1F77B4"/>
+            <a:srgbClr val="2CA02C"/>
           </a:solidFill>
           <a:ln>
             <a:noFill/>
@@ -5545,84 +5809,14 @@
       </p:sp>
       <p:sp>
         <p:nvSpPr>
-          <p:cNvPr id="3" name="TextBox 2"/>
+          <p:cNvPr id="8" name="TextBox 7"/>
           <p:cNvSpPr txBox="1"/>
           <p:nvPr/>
         </p:nvSpPr>
         <p:spPr>
           <a:xfrm>
-            <a:off x="457200" y="91440"/>
-            <a:ext cx="10972800" cy="640080"/>
-          </a:xfrm>
-          <a:prstGeom prst="rect">
-            <a:avLst/>
-          </a:prstGeom>
-          <a:noFill/>
-        </p:spPr>
-        <p:txBody>
-          <a:bodyPr wrap="square" anchor="ctr">
-            <a:spAutoFit/>
-          </a:bodyPr>
-          <a:lstStyle/>
-          <a:p>
-            <a:pPr algn="l"/>
-            <a:r>
-              <a:rPr sz="2800" b="1">
-                <a:solidFill>
-                  <a:srgbClr val="FFFFFF"/>
-                </a:solidFill>
-                <a:latin typeface="Microsoft YaHei"/>
-              </a:rPr>
-              <a:t>客户案例 | 永字资管战略合作</a:t>
-            </a:r>
-          </a:p>
-        </p:txBody>
-      </p:sp>
-      <p:sp>
-        <p:nvSpPr>
-          <p:cNvPr id="4" name="TextBox 3"/>
-          <p:cNvSpPr txBox="1"/>
-          <p:nvPr/>
-        </p:nvSpPr>
-        <p:spPr>
-          <a:xfrm>
-            <a:off x="457200" y="502920"/>
-            <a:ext cx="10972800" cy="274320"/>
-          </a:xfrm>
-          <a:prstGeom prst="rect">
-            <a:avLst/>
-          </a:prstGeom>
-          <a:noFill/>
-        </p:spPr>
-        <p:txBody>
-          <a:bodyPr wrap="square" anchor="ctr">
-            <a:spAutoFit/>
-          </a:bodyPr>
-          <a:lstStyle/>
-          <a:p>
-            <a:pPr algn="l"/>
-            <a:r>
-              <a:rPr sz="1200" b="0">
-                <a:solidFill>
-                  <a:srgbClr val="FFFFFF"/>
-                </a:solidFill>
-                <a:latin typeface="Microsoft YaHei"/>
-              </a:rPr>
-              <a:t>2026-05 签署  ·  POC 5 只产品  ·  节省 70% 成本</a:t>
-            </a:r>
-          </a:p>
-        </p:txBody>
-      </p:sp>
-      <p:sp>
-        <p:nvSpPr>
-          <p:cNvPr id="5" name="TextBox 4"/>
-          <p:cNvSpPr txBox="1"/>
-          <p:nvPr/>
-        </p:nvSpPr>
-        <p:spPr>
-          <a:xfrm>
-            <a:off x="457200" y="6537960"/>
-            <a:ext cx="11247120" cy="274320"/>
+            <a:off x="914400" y="2194560"/>
+            <a:ext cx="10332720" cy="548640"/>
           </a:xfrm>
           <a:prstGeom prst="rect">
             <a:avLst/>
@@ -5637,27 +5831,33 @@
           <a:p>
             <a:pPr algn="ctr"/>
             <a:r>
-              <a:rPr sz="1000" b="0">
-                <a:solidFill>
-                  <a:srgbClr val="888888"/>
-                </a:solidFill>
-                <a:latin typeface="Microsoft YaHei"/>
-              </a:rPr>
-              <a:t>AFAC2026 · 5 分钟路演  |  QuantInsight Pro</a:t>
-            </a:r>
-          </a:p>
-        </p:txBody>
-      </p:sp>
-      <p:sp>
-        <p:nvSpPr>
-          <p:cNvPr id="6" name="TextBox 5"/>
+              <a:rPr sz="2400" b="1">
+                <a:solidFill>
+                  <a:srgbClr val="FFFFFF"/>
+                </a:solidFill>
+                <a:latin typeface="微软雅黑" panose="020B0503020204020204" charset="-122"/>
+              </a:rPr>
+              <a:t>POC 5 只产品全部使用 QuantInsight Pro 多因子策略</a:t>
+            </a:r>
+            <a:endParaRPr sz="2400" b="1">
+              <a:solidFill>
+                <a:srgbClr val="FFFFFF"/>
+              </a:solidFill>
+              <a:latin typeface="微软雅黑" panose="020B0503020204020204" charset="-122"/>
+            </a:endParaRPr>
+          </a:p>
+        </p:txBody>
+      </p:sp>
+      <p:sp>
+        <p:nvSpPr>
+          <p:cNvPr id="9" name="TextBox 8"/>
           <p:cNvSpPr txBox="1"/>
           <p:nvPr/>
         </p:nvSpPr>
         <p:spPr>
           <a:xfrm>
-            <a:off x="457200" y="1280160"/>
-            <a:ext cx="11247120" cy="548640"/>
+            <a:off x="914400" y="2743200"/>
+            <a:ext cx="10332720" cy="548640"/>
           </a:xfrm>
           <a:prstGeom prst="rect">
             <a:avLst/>
@@ -5672,33 +5872,168 @@
           <a:p>
             <a:pPr algn="ctr"/>
             <a:r>
-              <a:rPr sz="2200" b="1">
-                <a:solidFill>
-                  <a:srgbClr val="1F77B4"/>
-                </a:solidFill>
-                <a:latin typeface="Microsoft YaHei"/>
-              </a:rPr>
-              <a:t>永字资管（薛永再 · 推荐单位 · 非参赛队员）</a:t>
-            </a:r>
-          </a:p>
-        </p:txBody>
-      </p:sp>
-      <p:sp>
-        <p:nvSpPr>
-          <p:cNvPr id="7" name="Rectangle 6"/>
+              <a:rPr sz="1800" b="0">
+                <a:solidFill>
+                  <a:srgbClr val="FFFFFF"/>
+                </a:solidFill>
+                <a:latin typeface="微软雅黑" panose="020B0503020204020204" charset="-122"/>
+              </a:rPr>
+              <a:t>替代原 Wind+优矿  ·  平均年化 8.56%  ·  监管合规 SHAP</a:t>
+            </a:r>
+            <a:endParaRPr sz="1800" b="0">
+              <a:solidFill>
+                <a:srgbClr val="FFFFFF"/>
+              </a:solidFill>
+              <a:latin typeface="微软雅黑" panose="020B0503020204020204" charset="-122"/>
+            </a:endParaRPr>
+          </a:p>
+        </p:txBody>
+      </p:sp>
+      <p:sp>
+        <p:nvSpPr>
+          <p:cNvPr id="10" name="TextBox 9"/>
+          <p:cNvSpPr txBox="1"/>
+          <p:nvPr/>
+        </p:nvSpPr>
+        <p:spPr>
+          <a:xfrm>
+            <a:off x="731520" y="3840480"/>
+            <a:ext cx="10515600" cy="2286000"/>
+          </a:xfrm>
+          <a:prstGeom prst="rect">
+            <a:avLst/>
+          </a:prstGeom>
+          <a:noFill/>
+        </p:spPr>
+        <p:txBody>
+          <a:bodyPr wrap="square">
+            <a:spAutoFit/>
+          </a:bodyPr>
+          <a:lstStyle/>
+          <a:p>
+            <a:pPr algn="l">
+              <a:spcAft>
+                <a:spcPts val="600"/>
+              </a:spcAft>
+            </a:pPr>
+            <a:r>
+              <a:rPr sz="1800">
+                <a:solidFill>
+                  <a:srgbClr val="1A1A1A"/>
+                </a:solidFill>
+                <a:latin typeface="微软雅黑" panose="020B0503020204020204" charset="-122"/>
+              </a:rPr>
+              <a:t>• ✅ 5 只产品：覆盖股票多头 / 量化对冲 / 主观选股</a:t>
+            </a:r>
+            <a:endParaRPr sz="1800">
+              <a:solidFill>
+                <a:srgbClr val="1A1A1A"/>
+              </a:solidFill>
+              <a:latin typeface="微软雅黑" panose="020B0503020204020204" charset="-122"/>
+            </a:endParaRPr>
+          </a:p>
+          <a:p>
+            <a:pPr algn="l">
+              <a:spcAft>
+                <a:spcPts val="600"/>
+              </a:spcAft>
+            </a:pPr>
+            <a:r>
+              <a:rPr sz="1800">
+                <a:solidFill>
+                  <a:srgbClr val="1A1A1A"/>
+                </a:solidFill>
+                <a:latin typeface="微软雅黑" panose="020B0503020204020204" charset="-122"/>
+              </a:rPr>
+              <a:t>• ✅ 节省 70% 工具成本：原 500 万/年 → 现 150 万/年</a:t>
+            </a:r>
+            <a:endParaRPr sz="1800">
+              <a:solidFill>
+                <a:srgbClr val="1A1A1A"/>
+              </a:solidFill>
+              <a:latin typeface="微软雅黑" panose="020B0503020204020204" charset="-122"/>
+            </a:endParaRPr>
+          </a:p>
+          <a:p>
+            <a:pPr algn="l">
+              <a:spcAft>
+                <a:spcPts val="600"/>
+              </a:spcAft>
+            </a:pPr>
+            <a:r>
+              <a:rPr sz="1800">
+                <a:solidFill>
+                  <a:srgbClr val="1A1A1A"/>
+                </a:solidFill>
+                <a:latin typeface="微软雅黑" panose="020B0503020204020204" charset="-122"/>
+              </a:rPr>
+              <a:t>• ✅ 监管友好：SHAP 归因报告自动生成，可审计</a:t>
+            </a:r>
+            <a:endParaRPr sz="1800">
+              <a:solidFill>
+                <a:srgbClr val="1A1A1A"/>
+              </a:solidFill>
+              <a:latin typeface="微软雅黑" panose="020B0503020204020204" charset="-122"/>
+            </a:endParaRPr>
+          </a:p>
+          <a:p>
+            <a:pPr algn="l">
+              <a:spcAft>
+                <a:spcPts val="600"/>
+              </a:spcAft>
+            </a:pPr>
+            <a:r>
+              <a:rPr sz="1800">
+                <a:solidFill>
+                  <a:srgbClr val="1A1A1A"/>
+                </a:solidFill>
+                <a:latin typeface="微软雅黑" panose="020B0503020204020204" charset="-122"/>
+              </a:rPr>
+              <a:t>• ✅ 法人薛永再战略背书（推荐单位）</a:t>
+            </a:r>
+            <a:endParaRPr sz="1800">
+              <a:solidFill>
+                <a:srgbClr val="1A1A1A"/>
+              </a:solidFill>
+              <a:latin typeface="微软雅黑" panose="020B0503020204020204" charset="-122"/>
+            </a:endParaRPr>
+          </a:p>
+        </p:txBody>
+      </p:sp>
+    </p:spTree>
+  </p:cSld>
+  <p:clrMapOvr>
+    <a:masterClrMapping/>
+  </p:clrMapOvr>
+</p:sld>
+</file>
+
+<file path=ppt/slides/slide7.xml><?xml version="1.0" encoding="utf-8"?>
+<p:sld xmlns:a="http://schemas.openxmlformats.org/drawingml/2006/main" xmlns:r="http://schemas.openxmlformats.org/officeDocument/2006/relationships" xmlns:p="http://schemas.openxmlformats.org/presentationml/2006/main">
+  <p:cSld>
+    <p:spTree>
+      <p:nvGrpSpPr>
+        <p:cNvPr id="1" name=""/>
+        <p:cNvGrpSpPr/>
+        <p:nvPr/>
+      </p:nvGrpSpPr>
+      <p:grpSpPr/>
+      <p:sp>
+        <p:nvSpPr>
+          <p:cNvPr id="2" name="Rectangle 1"/>
           <p:cNvSpPr/>
           <p:nvPr/>
         </p:nvSpPr>
         <p:spPr>
           <a:xfrm>
-            <a:off x="914400" y="2103120"/>
-            <a:ext cx="10332720" cy="1280160"/>
+            <a:off x="0" y="0"/>
+            <a:ext cx="12191695" cy="822960"/>
           </a:xfrm>
           <a:prstGeom prst="rect">
             <a:avLst/>
           </a:prstGeom>
           <a:solidFill>
-            <a:srgbClr val="2CA02C"/>
+            <a:srgbClr val="1F77B4"/>
           </a:solidFill>
           <a:ln>
             <a:noFill/>
@@ -5728,14 +6063,96 @@
       </p:sp>
       <p:sp>
         <p:nvSpPr>
-          <p:cNvPr id="8" name="TextBox 7"/>
+          <p:cNvPr id="3" name="TextBox 2"/>
           <p:cNvSpPr txBox="1"/>
           <p:nvPr/>
         </p:nvSpPr>
         <p:spPr>
           <a:xfrm>
-            <a:off x="914400" y="2194560"/>
-            <a:ext cx="10332720" cy="548640"/>
+            <a:off x="457200" y="91440"/>
+            <a:ext cx="10972800" cy="640080"/>
+          </a:xfrm>
+          <a:prstGeom prst="rect">
+            <a:avLst/>
+          </a:prstGeom>
+          <a:noFill/>
+        </p:spPr>
+        <p:txBody>
+          <a:bodyPr wrap="square" anchor="ctr">
+            <a:spAutoFit/>
+          </a:bodyPr>
+          <a:lstStyle/>
+          <a:p>
+            <a:pPr algn="l"/>
+            <a:r>
+              <a:rPr sz="2800" b="1">
+                <a:solidFill>
+                  <a:srgbClr val="FFFFFF"/>
+                </a:solidFill>
+                <a:latin typeface="微软雅黑" panose="020B0503020204020204" charset="-122"/>
+              </a:rPr>
+              <a:t>商业模式 | 9 宫格（Business Model Canvas）</a:t>
+            </a:r>
+            <a:endParaRPr sz="2800" b="1">
+              <a:solidFill>
+                <a:srgbClr val="FFFFFF"/>
+              </a:solidFill>
+              <a:latin typeface="微软雅黑" panose="020B0503020204020204" charset="-122"/>
+            </a:endParaRPr>
+          </a:p>
+        </p:txBody>
+      </p:sp>
+      <p:sp>
+        <p:nvSpPr>
+          <p:cNvPr id="4" name="TextBox 3"/>
+          <p:cNvSpPr txBox="1"/>
+          <p:nvPr/>
+        </p:nvSpPr>
+        <p:spPr>
+          <a:xfrm>
+            <a:off x="457200" y="502920"/>
+            <a:ext cx="10972800" cy="274320"/>
+          </a:xfrm>
+          <a:prstGeom prst="rect">
+            <a:avLst/>
+          </a:prstGeom>
+          <a:noFill/>
+        </p:spPr>
+        <p:txBody>
+          <a:bodyPr wrap="square" anchor="ctr">
+            <a:spAutoFit/>
+          </a:bodyPr>
+          <a:lstStyle/>
+          <a:p>
+            <a:pPr algn="l"/>
+            <a:r>
+              <a:rPr sz="1200" b="0">
+                <a:solidFill>
+                  <a:srgbClr val="FFFFFF"/>
+                </a:solidFill>
+                <a:latin typeface="微软雅黑" panose="020B0503020204020204" charset="-122"/>
+              </a:rPr>
+              <a:t>4 客群 × 3 订阅 + 9 渠道 + 3 大护城河</a:t>
+            </a:r>
+            <a:endParaRPr sz="1200" b="0">
+              <a:solidFill>
+                <a:srgbClr val="FFFFFF"/>
+              </a:solidFill>
+              <a:latin typeface="微软雅黑" panose="020B0503020204020204" charset="-122"/>
+            </a:endParaRPr>
+          </a:p>
+        </p:txBody>
+      </p:sp>
+      <p:sp>
+        <p:nvSpPr>
+          <p:cNvPr id="5" name="TextBox 4"/>
+          <p:cNvSpPr txBox="1"/>
+          <p:nvPr/>
+        </p:nvSpPr>
+        <p:spPr>
+          <a:xfrm>
+            <a:off x="457200" y="6537960"/>
+            <a:ext cx="11247120" cy="274320"/>
           </a:xfrm>
           <a:prstGeom prst="rect">
             <a:avLst/>
@@ -5750,27 +6167,57 @@
           <a:p>
             <a:pPr algn="ctr"/>
             <a:r>
-              <a:rPr sz="2400" b="1">
-                <a:solidFill>
-                  <a:srgbClr val="FFFFFF"/>
-                </a:solidFill>
-                <a:latin typeface="Microsoft YaHei"/>
-              </a:rPr>
-              <a:t>POC 5 只产品全部使用 QuantInsight Pro 多因子策略</a:t>
-            </a:r>
-          </a:p>
-        </p:txBody>
-      </p:sp>
-      <p:sp>
-        <p:nvSpPr>
-          <p:cNvPr id="9" name="TextBox 8"/>
+              <a:rPr sz="1000" b="0">
+                <a:solidFill>
+                  <a:srgbClr val="888888"/>
+                </a:solidFill>
+                <a:latin typeface="微软雅黑" panose="020B0503020204020204" charset="-122"/>
+              </a:rPr>
+              <a:t>AFAC2026 · 5 分钟路演  |  QuantInsight Pro</a:t>
+            </a:r>
+            <a:endParaRPr sz="1000" b="0">
+              <a:solidFill>
+                <a:srgbClr val="888888"/>
+              </a:solidFill>
+              <a:latin typeface="微软雅黑" panose="020B0503020204020204" charset="-122"/>
+            </a:endParaRPr>
+          </a:p>
+        </p:txBody>
+      </p:sp>
+      <p:pic>
+        <p:nvPicPr>
+          <p:cNvPr id="6" name="Picture 5" descr="01_business_model_canvas.png"/>
+          <p:cNvPicPr>
+            <a:picLocks noChangeAspect="1"/>
+          </p:cNvPicPr>
+          <p:nvPr/>
+        </p:nvPicPr>
+        <p:blipFill>
+          <a:blip r:embed="rId1"/>
+          <a:stretch>
+            <a:fillRect/>
+          </a:stretch>
+        </p:blipFill>
+        <p:spPr>
+          <a:xfrm>
+            <a:off x="457200" y="1005840"/>
+            <a:ext cx="11247120" cy="7804571"/>
+          </a:xfrm>
+          <a:prstGeom prst="rect">
+            <a:avLst/>
+          </a:prstGeom>
+        </p:spPr>
+      </p:pic>
+      <p:sp>
+        <p:nvSpPr>
+          <p:cNvPr id="7" name="TextBox 6"/>
           <p:cNvSpPr txBox="1"/>
           <p:nvPr/>
         </p:nvSpPr>
         <p:spPr>
           <a:xfrm>
-            <a:off x="914400" y="2743200"/>
-            <a:ext cx="10332720" cy="548640"/>
+            <a:off x="457200" y="6126480"/>
+            <a:ext cx="11247120" cy="365760"/>
           </a:xfrm>
           <a:prstGeom prst="rect">
             <a:avLst/>
@@ -5785,101 +6232,20 @@
           <a:p>
             <a:pPr algn="ctr"/>
             <a:r>
-              <a:rPr sz="1800" b="0">
-                <a:solidFill>
-                  <a:srgbClr val="FFFFFF"/>
-                </a:solidFill>
-                <a:latin typeface="Microsoft YaHei"/>
-              </a:rPr>
-              <a:t>替代原 Wind+优矿  ·  平均年化 8.56%  ·  监管合规 SHAP</a:t>
-            </a:r>
-          </a:p>
-        </p:txBody>
-      </p:sp>
-      <p:sp>
-        <p:nvSpPr>
-          <p:cNvPr id="10" name="TextBox 9"/>
-          <p:cNvSpPr txBox="1"/>
-          <p:nvPr/>
-        </p:nvSpPr>
-        <p:spPr>
-          <a:xfrm>
-            <a:off x="731520" y="3840480"/>
-            <a:ext cx="10515600" cy="2286000"/>
-          </a:xfrm>
-          <a:prstGeom prst="rect">
-            <a:avLst/>
-          </a:prstGeom>
-          <a:noFill/>
-        </p:spPr>
-        <p:txBody>
-          <a:bodyPr wrap="square">
-            <a:spAutoFit/>
-          </a:bodyPr>
-          <a:lstStyle/>
-          <a:p>
-            <a:pPr algn="l">
-              <a:spcAft>
-                <a:spcPts val="600"/>
-              </a:spcAft>
-            </a:pPr>
-            <a:r>
-              <a:rPr sz="1800">
-                <a:solidFill>
-                  <a:srgbClr val="1A1A1A"/>
-                </a:solidFill>
-                <a:latin typeface="Microsoft YaHei"/>
-              </a:rPr>
-              <a:t>• ✅ 5 只产品：覆盖股票多头 / 量化对冲 / 主观选股</a:t>
-            </a:r>
-          </a:p>
-          <a:p>
-            <a:pPr algn="l">
-              <a:spcAft>
-                <a:spcPts val="600"/>
-              </a:spcAft>
-            </a:pPr>
-            <a:r>
-              <a:rPr sz="1800">
-                <a:solidFill>
-                  <a:srgbClr val="1A1A1A"/>
-                </a:solidFill>
-                <a:latin typeface="Microsoft YaHei"/>
-              </a:rPr>
-              <a:t>• ✅ 节省 70% 工具成本：原 500 万/年 → 现 150 万/年</a:t>
-            </a:r>
-          </a:p>
-          <a:p>
-            <a:pPr algn="l">
-              <a:spcAft>
-                <a:spcPts val="600"/>
-              </a:spcAft>
-            </a:pPr>
-            <a:r>
-              <a:rPr sz="1800">
-                <a:solidFill>
-                  <a:srgbClr val="1A1A1A"/>
-                </a:solidFill>
-                <a:latin typeface="Microsoft YaHei"/>
-              </a:rPr>
-              <a:t>• ✅ 监管友好：SHAP 归因报告自动生成，可审计</a:t>
-            </a:r>
-          </a:p>
-          <a:p>
-            <a:pPr algn="l">
-              <a:spcAft>
-                <a:spcPts val="600"/>
-              </a:spcAft>
-            </a:pPr>
-            <a:r>
-              <a:rPr sz="1800">
-                <a:solidFill>
-                  <a:srgbClr val="1A1A1A"/>
-                </a:solidFill>
-                <a:latin typeface="Microsoft YaHei"/>
-              </a:rPr>
-              <a:t>• ✅ 法人薛永再战略背书（推荐单位）</a:t>
-            </a:r>
+              <a:rPr sz="1600" b="1">
+                <a:solidFill>
+                  <a:srgbClr val="2CA02C"/>
+                </a:solidFill>
+                <a:latin typeface="微软雅黑" panose="020B0503020204020204" charset="-122"/>
+              </a:rPr>
+              <a:t>LTV/CAC = 82.2（行业 3.0）  ·  NRR = 140%  ·  Y3 毛利率 72%</a:t>
+            </a:r>
+            <a:endParaRPr sz="1600" b="1">
+              <a:solidFill>
+                <a:srgbClr val="2CA02C"/>
+              </a:solidFill>
+              <a:latin typeface="微软雅黑" panose="020B0503020204020204" charset="-122"/>
+            </a:endParaRPr>
           </a:p>
         </p:txBody>
       </p:sp>
@@ -5891,8 +6257,8 @@
 </p:sld>
 </file>
 
-<file path=ppt/slides/slide7.xml><?xml version="1.0" encoding="utf-8"?>
-<p:sld xmlns:a="http://schemas.openxmlformats.org/drawingml/2006/main" xmlns:p="http://schemas.openxmlformats.org/presentationml/2006/main" xmlns:r="http://schemas.openxmlformats.org/officeDocument/2006/relationships">
+<file path=ppt/slides/slide8.xml><?xml version="1.0" encoding="utf-8"?>
+<p:sld xmlns:a="http://schemas.openxmlformats.org/drawingml/2006/main" xmlns:r="http://schemas.openxmlformats.org/officeDocument/2006/relationships" xmlns:p="http://schemas.openxmlformats.org/presentationml/2006/main">
   <p:cSld>
     <p:spTree>
       <p:nvGrpSpPr>
@@ -5972,10 +6338,16 @@
                 <a:solidFill>
                   <a:srgbClr val="FFFFFF"/>
                 </a:solidFill>
-                <a:latin typeface="Microsoft YaHei"/>
-              </a:rPr>
-              <a:t>商业模式 | 9 宫格（Business Model Canvas）</a:t>
-            </a:r>
+                <a:latin typeface="微软雅黑" panose="020B0503020204020204" charset="-122"/>
+              </a:rPr>
+              <a:t>财务 | 5 年 30 → 620 客户</a:t>
+            </a:r>
+            <a:endParaRPr sz="2800" b="1">
+              <a:solidFill>
+                <a:srgbClr val="FFFFFF"/>
+              </a:solidFill>
+              <a:latin typeface="微软雅黑" panose="020B0503020204020204" charset="-122"/>
+            </a:endParaRPr>
           </a:p>
         </p:txBody>
       </p:sp>
@@ -6007,10 +6379,16 @@
                 <a:solidFill>
                   <a:srgbClr val="FFFFFF"/>
                 </a:solidFill>
-                <a:latin typeface="Microsoft YaHei"/>
-              </a:rPr>
-              <a:t>4 客群 × 3 订阅 + 9 渠道 + 3 大护城河</a:t>
-            </a:r>
+                <a:latin typeface="微软雅黑" panose="020B0503020204020204" charset="-122"/>
+              </a:rPr>
+              <a:t>ARR 1.98 亿 → 5.85 亿  ·  Y3 毛利率 72%</a:t>
+            </a:r>
+            <a:endParaRPr sz="1200" b="0">
+              <a:solidFill>
+                <a:srgbClr val="FFFFFF"/>
+              </a:solidFill>
+              <a:latin typeface="微软雅黑" panose="020B0503020204020204" charset="-122"/>
+            </a:endParaRPr>
           </a:p>
         </p:txBody>
       </p:sp>
@@ -6042,31 +6420,37 @@
                 <a:solidFill>
                   <a:srgbClr val="888888"/>
                 </a:solidFill>
-                <a:latin typeface="Microsoft YaHei"/>
+                <a:latin typeface="微软雅黑" panose="020B0503020204020204" charset="-122"/>
               </a:rPr>
               <a:t>AFAC2026 · 5 分钟路演  |  QuantInsight Pro</a:t>
             </a:r>
+            <a:endParaRPr sz="1000" b="0">
+              <a:solidFill>
+                <a:srgbClr val="888888"/>
+              </a:solidFill>
+              <a:latin typeface="微软雅黑" panose="020B0503020204020204" charset="-122"/>
+            </a:endParaRPr>
           </a:p>
         </p:txBody>
       </p:sp>
       <p:pic>
         <p:nvPicPr>
-          <p:cNvPr id="6" name="Picture 5" descr="01_business_model_canvas.png"/>
+          <p:cNvPr id="6" name="Picture 5" descr="05_client_growth.png"/>
           <p:cNvPicPr>
             <a:picLocks noChangeAspect="1"/>
           </p:cNvPicPr>
           <p:nvPr/>
         </p:nvPicPr>
         <p:blipFill>
-          <a:blip r:embed="rId2"/>
+          <a:blip r:embed="rId1"/>
           <a:stretch>
             <a:fillRect/>
           </a:stretch>
         </p:blipFill>
         <p:spPr>
           <a:xfrm>
-            <a:off x="457200" y="1005840"/>
-            <a:ext cx="11247120" cy="7804571"/>
+            <a:off x="274320" y="1097280"/>
+            <a:ext cx="7772400" cy="4634041"/>
           </a:xfrm>
           <a:prstGeom prst="rect">
             <a:avLst/>
@@ -6081,8 +6465,8 @@
         </p:nvSpPr>
         <p:spPr>
           <a:xfrm>
-            <a:off x="457200" y="6126480"/>
-            <a:ext cx="11247120" cy="365760"/>
+            <a:off x="8229600" y="1371600"/>
+            <a:ext cx="3657600" cy="457200"/>
           </a:xfrm>
           <a:prstGeom prst="rect">
             <a:avLst/>
@@ -6095,16 +6479,218 @@
           </a:bodyPr>
           <a:lstStyle/>
           <a:p>
+            <a:pPr algn="l"/>
+            <a:r>
+              <a:rPr sz="1800" b="1">
+                <a:solidFill>
+                  <a:srgbClr val="1F77B4"/>
+                </a:solidFill>
+                <a:latin typeface="微软雅黑" panose="020B0503020204020204" charset="-122"/>
+              </a:rPr>
+              <a:t>5 年财务：</a:t>
+            </a:r>
+            <a:endParaRPr sz="1800" b="1">
+              <a:solidFill>
+                <a:srgbClr val="1F77B4"/>
+              </a:solidFill>
+              <a:latin typeface="微软雅黑" panose="020B0503020204020204" charset="-122"/>
+            </a:endParaRPr>
+          </a:p>
+        </p:txBody>
+      </p:sp>
+      <p:sp>
+        <p:nvSpPr>
+          <p:cNvPr id="8" name="TextBox 7"/>
+          <p:cNvSpPr txBox="1"/>
+          <p:nvPr/>
+        </p:nvSpPr>
+        <p:spPr>
+          <a:xfrm>
+            <a:off x="8229600" y="1920240"/>
+            <a:ext cx="3657600" cy="4572000"/>
+          </a:xfrm>
+          <a:prstGeom prst="rect">
+            <a:avLst/>
+          </a:prstGeom>
+          <a:noFill/>
+        </p:spPr>
+        <p:txBody>
+          <a:bodyPr wrap="square">
+            <a:spAutoFit/>
+          </a:bodyPr>
+          <a:lstStyle/>
+          <a:p>
+            <a:pPr algn="l">
+              <a:spcAft>
+                <a:spcPts val="600"/>
+              </a:spcAft>
+            </a:pPr>
+            <a:r>
+              <a:rPr sz="1600">
+                <a:solidFill>
+                  <a:srgbClr val="1A1A1A"/>
+                </a:solidFill>
+                <a:latin typeface="微软雅黑" panose="020B0503020204020204" charset="-122"/>
+              </a:rPr>
+              <a:t>• Y1: 30 客户  ·  ARR 1.98 亿</a:t>
+            </a:r>
+            <a:endParaRPr sz="1600">
+              <a:solidFill>
+                <a:srgbClr val="1A1A1A"/>
+              </a:solidFill>
+              <a:latin typeface="微软雅黑" panose="020B0503020204020204" charset="-122"/>
+            </a:endParaRPr>
+          </a:p>
+          <a:p>
+            <a:pPr algn="l">
+              <a:spcAft>
+                <a:spcPts val="600"/>
+              </a:spcAft>
+            </a:pPr>
+            <a:r>
+              <a:rPr sz="1600">
+                <a:solidFill>
+                  <a:srgbClr val="1A1A1A"/>
+                </a:solidFill>
+                <a:latin typeface="微软雅黑" panose="020B0503020204020204" charset="-122"/>
+              </a:rPr>
+              <a:t>• Y3: 220 客户  ·  ARR 4.20 亿</a:t>
+            </a:r>
+            <a:endParaRPr sz="1600">
+              <a:solidFill>
+                <a:srgbClr val="1A1A1A"/>
+              </a:solidFill>
+              <a:latin typeface="微软雅黑" panose="020B0503020204020204" charset="-122"/>
+            </a:endParaRPr>
+          </a:p>
+          <a:p>
+            <a:pPr algn="l">
+              <a:spcAft>
+                <a:spcPts val="600"/>
+              </a:spcAft>
+            </a:pPr>
+            <a:r>
+              <a:rPr sz="1600">
+                <a:solidFill>
+                  <a:srgbClr val="1A1A1A"/>
+                </a:solidFill>
+                <a:latin typeface="微软雅黑" panose="020B0503020204020204" charset="-122"/>
+              </a:rPr>
+              <a:t>• Y5: 620 客户  ·  ARR 5.85 亿</a:t>
+            </a:r>
+            <a:endParaRPr sz="1600">
+              <a:solidFill>
+                <a:srgbClr val="1A1A1A"/>
+              </a:solidFill>
+              <a:latin typeface="微软雅黑" panose="020B0503020204020204" charset="-122"/>
+            </a:endParaRPr>
+          </a:p>
+          <a:p>
+            <a:pPr algn="l">
+              <a:spcAft>
+                <a:spcPts val="600"/>
+              </a:spcAft>
+            </a:pPr>
+            <a:r>
+              <a:rPr sz="1600">
+                <a:solidFill>
+                  <a:srgbClr val="1A1A1A"/>
+                </a:solidFill>
+                <a:latin typeface="微软雅黑" panose="020B0503020204020204" charset="-122"/>
+              </a:rPr>
+              <a:t>• 毛利率:  62% → 72%</a:t>
+            </a:r>
+            <a:endParaRPr sz="1600">
+              <a:solidFill>
+                <a:srgbClr val="1A1A1A"/>
+              </a:solidFill>
+              <a:latin typeface="微软雅黑" panose="020B0503020204020204" charset="-122"/>
+            </a:endParaRPr>
+          </a:p>
+          <a:p>
+            <a:pPr algn="l">
+              <a:spcAft>
+                <a:spcPts val="600"/>
+              </a:spcAft>
+            </a:pPr>
+            <a:r>
+              <a:rPr sz="1600">
+                <a:solidFill>
+                  <a:srgbClr val="1A1A1A"/>
+                </a:solidFill>
+                <a:latin typeface="微软雅黑" panose="020B0503020204020204" charset="-122"/>
+              </a:rPr>
+              <a:t>• CAC 回收: 8 个月</a:t>
+            </a:r>
+            <a:endParaRPr sz="1600">
+              <a:solidFill>
+                <a:srgbClr val="1A1A1A"/>
+              </a:solidFill>
+              <a:latin typeface="微软雅黑" panose="020B0503020204020204" charset="-122"/>
+            </a:endParaRPr>
+          </a:p>
+          <a:p>
+            <a:pPr algn="l">
+              <a:spcAft>
+                <a:spcPts val="600"/>
+              </a:spcAft>
+            </a:pPr>
+            <a:r>
+              <a:rPr sz="1600">
+                <a:solidFill>
+                  <a:srgbClr val="1A1A1A"/>
+                </a:solidFill>
+                <a:latin typeface="微软雅黑" panose="020B0503020204020204" charset="-122"/>
+              </a:rPr>
+              <a:t>• LTV/CAC: 82.2</a:t>
+            </a:r>
+            <a:endParaRPr sz="1600">
+              <a:solidFill>
+                <a:srgbClr val="1A1A1A"/>
+              </a:solidFill>
+              <a:latin typeface="微软雅黑" panose="020B0503020204020204" charset="-122"/>
+            </a:endParaRPr>
+          </a:p>
+        </p:txBody>
+      </p:sp>
+      <p:sp>
+        <p:nvSpPr>
+          <p:cNvPr id="9" name="TextBox 8"/>
+          <p:cNvSpPr txBox="1"/>
+          <p:nvPr/>
+        </p:nvSpPr>
+        <p:spPr>
+          <a:xfrm>
+            <a:off x="457200" y="6126480"/>
+            <a:ext cx="11247120" cy="365760"/>
+          </a:xfrm>
+          <a:prstGeom prst="rect">
+            <a:avLst/>
+          </a:prstGeom>
+          <a:noFill/>
+        </p:spPr>
+        <p:txBody>
+          <a:bodyPr wrap="square" anchor="t">
+            <a:spAutoFit/>
+          </a:bodyPr>
+          <a:lstStyle/>
+          <a:p>
             <a:pPr algn="ctr"/>
             <a:r>
               <a:rPr sz="1600" b="1">
                 <a:solidFill>
                   <a:srgbClr val="2CA02C"/>
                 </a:solidFill>
-                <a:latin typeface="Microsoft YaHei"/>
-              </a:rPr>
-              <a:t>LTV/CAC = 82.2（行业 3.0）  ·  NRR = 140%  ·  Y3 毛利率 72%</a:t>
-            </a:r>
+                <a:latin typeface="微软雅黑" panose="020B0503020204020204" charset="-122"/>
+              </a:rPr>
+              <a:t>TAM 75 亿 / SAM 22 亿 / SOM 5.6 亿（首期 5%）</a:t>
+            </a:r>
+            <a:endParaRPr sz="1600" b="1">
+              <a:solidFill>
+                <a:srgbClr val="2CA02C"/>
+              </a:solidFill>
+              <a:latin typeface="微软雅黑" panose="020B0503020204020204" charset="-122"/>
+            </a:endParaRPr>
           </a:p>
         </p:txBody>
       </p:sp>
@@ -6116,8 +6702,8 @@
 </p:sld>
 </file>
 
-<file path=ppt/slides/slide8.xml><?xml version="1.0" encoding="utf-8"?>
-<p:sld xmlns:a="http://schemas.openxmlformats.org/drawingml/2006/main" xmlns:p="http://schemas.openxmlformats.org/presentationml/2006/main" xmlns:r="http://schemas.openxmlformats.org/officeDocument/2006/relationships">
+<file path=ppt/slides/slide9.xml><?xml version="1.0" encoding="utf-8"?>
+<p:sld xmlns:a="http://schemas.openxmlformats.org/drawingml/2006/main" xmlns:r="http://schemas.openxmlformats.org/officeDocument/2006/relationships" xmlns:p="http://schemas.openxmlformats.org/presentationml/2006/main">
   <p:cSld>
     <p:spTree>
       <p:nvGrpSpPr>
@@ -6177,8 +6763,8 @@
         </p:nvSpPr>
         <p:spPr>
           <a:xfrm>
-            <a:off x="457200" y="91440"/>
-            <a:ext cx="10972800" cy="640080"/>
+            <a:off x="457200" y="150495"/>
+            <a:ext cx="10972800" cy="521970"/>
           </a:xfrm>
           <a:prstGeom prst="rect">
             <a:avLst/>
@@ -6197,45 +6783,25 @@
                 <a:solidFill>
                   <a:srgbClr val="FFFFFF"/>
                 </a:solidFill>
-                <a:latin typeface="Microsoft YaHei"/>
-              </a:rPr>
-              <a:t>财务 | 5 年 30 → 620 客户</a:t>
-            </a:r>
-          </a:p>
-        </p:txBody>
-      </p:sp>
-      <p:sp>
-        <p:nvSpPr>
-          <p:cNvPr id="4" name="TextBox 3"/>
-          <p:cNvSpPr txBox="1"/>
-          <p:nvPr/>
-        </p:nvSpPr>
-        <p:spPr>
-          <a:xfrm>
-            <a:off x="457200" y="502920"/>
-            <a:ext cx="10972800" cy="274320"/>
-          </a:xfrm>
-          <a:prstGeom prst="rect">
-            <a:avLst/>
-          </a:prstGeom>
-          <a:noFill/>
-        </p:spPr>
-        <p:txBody>
-          <a:bodyPr wrap="square" anchor="ctr">
-            <a:spAutoFit/>
-          </a:bodyPr>
-          <a:lstStyle/>
-          <a:p>
-            <a:pPr algn="l"/>
-            <a:r>
-              <a:rPr sz="1200" b="0">
+                <a:latin typeface="微软雅黑" panose="020B0503020204020204" charset="-122"/>
+              </a:rPr>
+              <a:t>团队 | 4 创始</a:t>
+            </a:r>
+            <a:r>
+              <a:rPr lang="zh-CN" sz="2800" b="1">
                 <a:solidFill>
                   <a:srgbClr val="FFFFFF"/>
                 </a:solidFill>
-                <a:latin typeface="Microsoft YaHei"/>
-              </a:rPr>
-              <a:t>ARR 1.98 亿 → 5.85 亿  ·  Y3 毛利率 72%</a:t>
-            </a:r>
+                <a:latin typeface="微软雅黑" panose="020B0503020204020204" charset="-122"/>
+              </a:rPr>
+              <a:t>人</a:t>
+            </a:r>
+            <a:endParaRPr lang="zh-CN" sz="2800" b="1">
+              <a:solidFill>
+                <a:srgbClr val="FFFFFF"/>
+              </a:solidFill>
+              <a:latin typeface="微软雅黑" panose="020B0503020204020204" charset="-122"/>
+            </a:endParaRPr>
           </a:p>
         </p:txBody>
       </p:sp>
@@ -6267,389 +6833,16 @@
                 <a:solidFill>
                   <a:srgbClr val="888888"/>
                 </a:solidFill>
-                <a:latin typeface="Microsoft YaHei"/>
+                <a:latin typeface="微软雅黑" panose="020B0503020204020204" charset="-122"/>
               </a:rPr>
               <a:t>AFAC2026 · 5 分钟路演  |  QuantInsight Pro</a:t>
             </a:r>
-          </a:p>
-        </p:txBody>
-      </p:sp>
-      <p:pic>
-        <p:nvPicPr>
-          <p:cNvPr id="6" name="Picture 5" descr="05_client_growth.png"/>
-          <p:cNvPicPr>
-            <a:picLocks noChangeAspect="1"/>
-          </p:cNvPicPr>
-          <p:nvPr/>
-        </p:nvPicPr>
-        <p:blipFill>
-          <a:blip r:embed="rId2"/>
-          <a:stretch>
-            <a:fillRect/>
-          </a:stretch>
-        </p:blipFill>
-        <p:spPr>
-          <a:xfrm>
-            <a:off x="274320" y="1097280"/>
-            <a:ext cx="7772400" cy="4634041"/>
-          </a:xfrm>
-          <a:prstGeom prst="rect">
-            <a:avLst/>
-          </a:prstGeom>
-        </p:spPr>
-      </p:pic>
-      <p:sp>
-        <p:nvSpPr>
-          <p:cNvPr id="7" name="TextBox 6"/>
-          <p:cNvSpPr txBox="1"/>
-          <p:nvPr/>
-        </p:nvSpPr>
-        <p:spPr>
-          <a:xfrm>
-            <a:off x="8229600" y="1371600"/>
-            <a:ext cx="3657600" cy="457200"/>
-          </a:xfrm>
-          <a:prstGeom prst="rect">
-            <a:avLst/>
-          </a:prstGeom>
-          <a:noFill/>
-        </p:spPr>
-        <p:txBody>
-          <a:bodyPr wrap="square" anchor="t">
-            <a:spAutoFit/>
-          </a:bodyPr>
-          <a:lstStyle/>
-          <a:p>
-            <a:pPr algn="l"/>
-            <a:r>
-              <a:rPr sz="1800" b="1">
-                <a:solidFill>
-                  <a:srgbClr val="1F77B4"/>
-                </a:solidFill>
-                <a:latin typeface="Microsoft YaHei"/>
-              </a:rPr>
-              <a:t>5 年财务：</a:t>
-            </a:r>
-          </a:p>
-        </p:txBody>
-      </p:sp>
-      <p:sp>
-        <p:nvSpPr>
-          <p:cNvPr id="8" name="TextBox 7"/>
-          <p:cNvSpPr txBox="1"/>
-          <p:nvPr/>
-        </p:nvSpPr>
-        <p:spPr>
-          <a:xfrm>
-            <a:off x="8229600" y="1920240"/>
-            <a:ext cx="3657600" cy="4572000"/>
-          </a:xfrm>
-          <a:prstGeom prst="rect">
-            <a:avLst/>
-          </a:prstGeom>
-          <a:noFill/>
-        </p:spPr>
-        <p:txBody>
-          <a:bodyPr wrap="square">
-            <a:spAutoFit/>
-          </a:bodyPr>
-          <a:lstStyle/>
-          <a:p>
-            <a:pPr algn="l">
-              <a:spcAft>
-                <a:spcPts val="600"/>
-              </a:spcAft>
-            </a:pPr>
-            <a:r>
-              <a:rPr sz="1600">
-                <a:solidFill>
-                  <a:srgbClr val="1A1A1A"/>
-                </a:solidFill>
-                <a:latin typeface="Microsoft YaHei"/>
-              </a:rPr>
-              <a:t>• Y1: 30 客户  ·  ARR 1.98 亿</a:t>
-            </a:r>
-          </a:p>
-          <a:p>
-            <a:pPr algn="l">
-              <a:spcAft>
-                <a:spcPts val="600"/>
-              </a:spcAft>
-            </a:pPr>
-            <a:r>
-              <a:rPr sz="1600">
-                <a:solidFill>
-                  <a:srgbClr val="1A1A1A"/>
-                </a:solidFill>
-                <a:latin typeface="Microsoft YaHei"/>
-              </a:rPr>
-              <a:t>• Y3: 220 客户  ·  ARR 4.20 亿</a:t>
-            </a:r>
-          </a:p>
-          <a:p>
-            <a:pPr algn="l">
-              <a:spcAft>
-                <a:spcPts val="600"/>
-              </a:spcAft>
-            </a:pPr>
-            <a:r>
-              <a:rPr sz="1600">
-                <a:solidFill>
-                  <a:srgbClr val="1A1A1A"/>
-                </a:solidFill>
-                <a:latin typeface="Microsoft YaHei"/>
-              </a:rPr>
-              <a:t>• Y5: 620 客户  ·  ARR 5.85 亿</a:t>
-            </a:r>
-          </a:p>
-          <a:p>
-            <a:pPr algn="l">
-              <a:spcAft>
-                <a:spcPts val="600"/>
-              </a:spcAft>
-            </a:pPr>
-            <a:r>
-              <a:rPr sz="1600">
-                <a:solidFill>
-                  <a:srgbClr val="1A1A1A"/>
-                </a:solidFill>
-                <a:latin typeface="Microsoft YaHei"/>
-              </a:rPr>
-              <a:t>• 毛利率:  62% → 72%</a:t>
-            </a:r>
-          </a:p>
-          <a:p>
-            <a:pPr algn="l">
-              <a:spcAft>
-                <a:spcPts val="600"/>
-              </a:spcAft>
-            </a:pPr>
-            <a:r>
-              <a:rPr sz="1600">
-                <a:solidFill>
-                  <a:srgbClr val="1A1A1A"/>
-                </a:solidFill>
-                <a:latin typeface="Microsoft YaHei"/>
-              </a:rPr>
-              <a:t>• CAC 回收: 8 个月</a:t>
-            </a:r>
-          </a:p>
-          <a:p>
-            <a:pPr algn="l">
-              <a:spcAft>
-                <a:spcPts val="600"/>
-              </a:spcAft>
-            </a:pPr>
-            <a:r>
-              <a:rPr sz="1600">
-                <a:solidFill>
-                  <a:srgbClr val="1A1A1A"/>
-                </a:solidFill>
-                <a:latin typeface="Microsoft YaHei"/>
-              </a:rPr>
-              <a:t>• LTV/CAC: 82.2</a:t>
-            </a:r>
-          </a:p>
-        </p:txBody>
-      </p:sp>
-      <p:sp>
-        <p:nvSpPr>
-          <p:cNvPr id="9" name="TextBox 8"/>
-          <p:cNvSpPr txBox="1"/>
-          <p:nvPr/>
-        </p:nvSpPr>
-        <p:spPr>
-          <a:xfrm>
-            <a:off x="457200" y="6126480"/>
-            <a:ext cx="11247120" cy="365760"/>
-          </a:xfrm>
-          <a:prstGeom prst="rect">
-            <a:avLst/>
-          </a:prstGeom>
-          <a:noFill/>
-        </p:spPr>
-        <p:txBody>
-          <a:bodyPr wrap="square" anchor="t">
-            <a:spAutoFit/>
-          </a:bodyPr>
-          <a:lstStyle/>
-          <a:p>
-            <a:pPr algn="ctr"/>
-            <a:r>
-              <a:rPr sz="1600" b="1">
-                <a:solidFill>
-                  <a:srgbClr val="2CA02C"/>
-                </a:solidFill>
-                <a:latin typeface="Microsoft YaHei"/>
-              </a:rPr>
-              <a:t>TAM 75 亿 / SAM 22 亿 / SOM 5.6 亿（首期 5%）</a:t>
-            </a:r>
-          </a:p>
-        </p:txBody>
-      </p:sp>
-    </p:spTree>
-  </p:cSld>
-  <p:clrMapOvr>
-    <a:masterClrMapping/>
-  </p:clrMapOvr>
-</p:sld>
-</file>
-
-<file path=ppt/slides/slide9.xml><?xml version="1.0" encoding="utf-8"?>
-<p:sld xmlns:a="http://schemas.openxmlformats.org/drawingml/2006/main" xmlns:p="http://schemas.openxmlformats.org/presentationml/2006/main" xmlns:r="http://schemas.openxmlformats.org/officeDocument/2006/relationships">
-  <p:cSld>
-    <p:spTree>
-      <p:nvGrpSpPr>
-        <p:cNvPr id="1" name=""/>
-        <p:cNvGrpSpPr/>
-        <p:nvPr/>
-      </p:nvGrpSpPr>
-      <p:grpSpPr/>
-      <p:sp>
-        <p:nvSpPr>
-          <p:cNvPr id="2" name="Rectangle 1"/>
-          <p:cNvSpPr/>
-          <p:nvPr/>
-        </p:nvSpPr>
-        <p:spPr>
-          <a:xfrm>
-            <a:off x="0" y="0"/>
-            <a:ext cx="12191695" cy="822960"/>
-          </a:xfrm>
-          <a:prstGeom prst="rect">
-            <a:avLst/>
-          </a:prstGeom>
-          <a:solidFill>
-            <a:srgbClr val="1F77B4"/>
-          </a:solidFill>
-          <a:ln>
-            <a:noFill/>
-          </a:ln>
-        </p:spPr>
-        <p:style>
-          <a:lnRef idx="1">
-            <a:schemeClr val="accent1"/>
-          </a:lnRef>
-          <a:fillRef idx="3">
-            <a:schemeClr val="accent1"/>
-          </a:fillRef>
-          <a:effectRef idx="2">
-            <a:schemeClr val="accent1"/>
-          </a:effectRef>
-          <a:fontRef idx="minor">
-            <a:schemeClr val="lt1"/>
-          </a:fontRef>
-        </p:style>
-        <p:txBody>
-          <a:bodyPr rtlCol="0" anchor="ctr"/>
-          <a:lstStyle/>
-          <a:p>
-            <a:pPr algn="ctr"/>
-          </a:p>
-        </p:txBody>
-      </p:sp>
-      <p:sp>
-        <p:nvSpPr>
-          <p:cNvPr id="3" name="TextBox 2"/>
-          <p:cNvSpPr txBox="1"/>
-          <p:nvPr/>
-        </p:nvSpPr>
-        <p:spPr>
-          <a:xfrm>
-            <a:off x="457200" y="91440"/>
-            <a:ext cx="10972800" cy="640080"/>
-          </a:xfrm>
-          <a:prstGeom prst="rect">
-            <a:avLst/>
-          </a:prstGeom>
-          <a:noFill/>
-        </p:spPr>
-        <p:txBody>
-          <a:bodyPr wrap="square" anchor="ctr">
-            <a:spAutoFit/>
-          </a:bodyPr>
-          <a:lstStyle/>
-          <a:p>
-            <a:pPr algn="l"/>
-            <a:r>
-              <a:rPr sz="2800" b="1">
-                <a:solidFill>
-                  <a:srgbClr val="FFFFFF"/>
-                </a:solidFill>
-                <a:latin typeface="Microsoft YaHei"/>
-              </a:rPr>
-              <a:t>团队 | 4 创始 + 5 顾问 + 5 校 MOU</a:t>
-            </a:r>
-          </a:p>
-        </p:txBody>
-      </p:sp>
-      <p:sp>
-        <p:nvSpPr>
-          <p:cNvPr id="4" name="TextBox 3"/>
-          <p:cNvSpPr txBox="1"/>
-          <p:nvPr/>
-        </p:nvSpPr>
-        <p:spPr>
-          <a:xfrm>
-            <a:off x="457200" y="502920"/>
-            <a:ext cx="10972800" cy="274320"/>
-          </a:xfrm>
-          <a:prstGeom prst="rect">
-            <a:avLst/>
-          </a:prstGeom>
-          <a:noFill/>
-        </p:spPr>
-        <p:txBody>
-          <a:bodyPr wrap="square" anchor="ctr">
-            <a:spAutoFit/>
-          </a:bodyPr>
-          <a:lstStyle/>
-          <a:p>
-            <a:pPr algn="l"/>
-            <a:r>
-              <a:rPr sz="1200" b="0">
-                <a:solidFill>
-                  <a:srgbClr val="FFFFFF"/>
-                </a:solidFill>
-                <a:latin typeface="Microsoft YaHei"/>
-              </a:rPr>
-              <a:t>期权池 35%  ·  顾问委员会 5 位  ·  5 校人才 MOU</a:t>
-            </a:r>
-          </a:p>
-        </p:txBody>
-      </p:sp>
-      <p:sp>
-        <p:nvSpPr>
-          <p:cNvPr id="5" name="TextBox 4"/>
-          <p:cNvSpPr txBox="1"/>
-          <p:nvPr/>
-        </p:nvSpPr>
-        <p:spPr>
-          <a:xfrm>
-            <a:off x="457200" y="6537960"/>
-            <a:ext cx="11247120" cy="274320"/>
-          </a:xfrm>
-          <a:prstGeom prst="rect">
-            <a:avLst/>
-          </a:prstGeom>
-          <a:noFill/>
-        </p:spPr>
-        <p:txBody>
-          <a:bodyPr wrap="square" anchor="t">
-            <a:spAutoFit/>
-          </a:bodyPr>
-          <a:lstStyle/>
-          <a:p>
-            <a:pPr algn="ctr"/>
-            <a:r>
-              <a:rPr sz="1000" b="0">
-                <a:solidFill>
-                  <a:srgbClr val="888888"/>
-                </a:solidFill>
-                <a:latin typeface="Microsoft YaHei"/>
-              </a:rPr>
-              <a:t>AFAC2026 · 5 分钟路演  |  QuantInsight Pro</a:t>
-            </a:r>
+            <a:endParaRPr sz="1000" b="0">
+              <a:solidFill>
+                <a:srgbClr val="888888"/>
+              </a:solidFill>
+              <a:latin typeface="微软雅黑" panose="020B0503020204020204" charset="-122"/>
+            </a:endParaRPr>
           </a:p>
         </p:txBody>
       </p:sp>
@@ -6662,7 +6855,7 @@
           <p:nvPr/>
         </p:nvPicPr>
         <p:blipFill>
-          <a:blip r:embed="rId2"/>
+          <a:blip r:embed="rId1"/>
           <a:stretch>
             <a:fillRect/>
           </a:stretch>
@@ -6677,41 +6870,6 @@
           </a:prstGeom>
         </p:spPr>
       </p:pic>
-      <p:sp>
-        <p:nvSpPr>
-          <p:cNvPr id="7" name="TextBox 6"/>
-          <p:cNvSpPr txBox="1"/>
-          <p:nvPr/>
-        </p:nvSpPr>
-        <p:spPr>
-          <a:xfrm>
-            <a:off x="457200" y="6126480"/>
-            <a:ext cx="11247120" cy="365760"/>
-          </a:xfrm>
-          <a:prstGeom prst="rect">
-            <a:avLst/>
-          </a:prstGeom>
-          <a:noFill/>
-        </p:spPr>
-        <p:txBody>
-          <a:bodyPr wrap="square" anchor="t">
-            <a:spAutoFit/>
-          </a:bodyPr>
-          <a:lstStyle/>
-          <a:p>
-            <a:pPr algn="ctr"/>
-            <a:r>
-              <a:rPr sz="1400" b="0">
-                <a:solidFill>
-                  <a:srgbClr val="888888"/>
-                </a:solidFill>
-                <a:latin typeface="Microsoft YaHei"/>
-              </a:rPr>
-              <a:t>冯亦根 / 王宇寒 / 官馨 / 梁理智  ·  复旦 / 清华 / 交大 / 上财 / 浙大</a:t>
-            </a:r>
-          </a:p>
-        </p:txBody>
-      </p:sp>
     </p:spTree>
   </p:cSld>
   <p:clrMapOvr>
@@ -7036,6 +7194,10 @@
       </a:style>
     </a:lnDef>
   </a:objectDefaults>
-  <a:extraClrSchemeLst/>
+  <a:extLst>
+    <a:ext uri="{05A4C25C-085E-4340-85A3-A5531E510DB2}">
+      <thm15:themeFamily xmlns:thm15="http://schemas.microsoft.com/office/thememl/2012/main" name="Office Theme" id="{62F939B6-93AF-4DB8-9C6B-D6C7DFDC589F}" vid="{4A3C46E8-61CC-4603-A589-7422A47A8E4A}"/>
+    </a:ext>
+  </a:extLst>
 </a:theme>
 </file>